--- a/PPT Rapport.pptx
+++ b/PPT Rapport.pptx
@@ -4,6 +4,9 @@
   <p:sldMasterIdLst>
     <p:sldMasterId id="2147483648" r:id="rId1"/>
   </p:sldMasterIdLst>
+  <p:notesMasterIdLst>
+    <p:notesMasterId r:id="rId11"/>
+  </p:notesMasterIdLst>
   <p:sldIdLst>
     <p:sldId id="256" r:id="rId2"/>
     <p:sldId id="257" r:id="rId3"/>
@@ -15,10 +18,7 @@
     <p:sldId id="263" r:id="rId9"/>
     <p:sldId id="264" r:id="rId10"/>
   </p:sldIdLst>
-  <p:notesMasterIdLst>
-    <p:notesMasterId r:id="rId11"/>
-  </p:notesMasterIdLst>
-  <p:sldSz cx="9144000" cy="5143500"/>
+  <p:sldSz cx="9144000" cy="5143500" type="screen16x9"/>
   <p:notesSz cx="5143500" cy="9144000"/>
   <p:defaultTextStyle>
     <a:lvl1pPr marL="0" algn="l" defTabSz="914400" rtl="0" eaLnBrk="1" latinLnBrk="0" hangingPunct="1">
@@ -112,6 +112,11 @@
       </a:defRPr>
     </a:lvl9pPr>
   </p:defaultTextStyle>
+  <p:extLst>
+    <p:ext uri="{EFAFB233-063F-42B5-8137-9DF3F51BA10A}">
+      <p15:sldGuideLst xmlns:p15="http://schemas.microsoft.com/office/powerpoint/2012/main"/>
+    </p:ext>
+  </p:extLst>
 </p:presentation>
 </file>
 
@@ -137,234 +142,10 @@
           <a:chExt cx="0" cy="0"/>
         </a:xfrm>
       </p:grpSpPr>
-      <p:sp>
-        <p:nvSpPr>
-          <p:cNvPr id="2" name="Header Placeholder 1"/>
-          <p:cNvSpPr>
-            <a:spLocks noGrp="1"/>
-          </p:cNvSpPr>
-          <p:nvPr>
-            <p:ph type="hdr" sz="quarter"/>
-          </p:nvPr>
-        </p:nvSpPr>
-        <p:spPr>
-          <a:xfrm>
-            <a:off x="0" y="0"/>
-            <a:ext cx="2971800" cy="458788"/>
-          </a:xfrm>
-          <a:prstGeom prst="rect">
-            <a:avLst/>
-          </a:prstGeom>
-        </p:spPr>
-        <p:txBody>
-          <a:bodyPr vert="horz" lIns="91440" tIns="45720" rIns="91440" bIns="45720" rtlCol="0"/>
-          <a:lstStyle>
-            <a:lvl1pPr algn="l">
-              <a:defRPr sz="1200"/>
-            </a:lvl1pPr>
-          </a:lstStyle>
-          <a:p>
-            <a:endParaRPr lang="en-US"/>
-          </a:p>
-        </p:txBody>
-      </p:sp>
-      <p:sp>
-        <p:nvSpPr>
-          <p:cNvPr id="3" name="Date Placeholder 2"/>
-          <p:cNvSpPr>
-            <a:spLocks noGrp="1"/>
-          </p:cNvSpPr>
-          <p:nvPr>
-            <p:ph type="dt" idx="1"/>
-          </p:nvPr>
-        </p:nvSpPr>
-        <p:spPr>
-          <a:xfrm>
-            <a:off x="3884613" y="0"/>
-            <a:ext cx="2971800" cy="458788"/>
-          </a:xfrm>
-          <a:prstGeom prst="rect">
-            <a:avLst/>
-          </a:prstGeom>
-        </p:spPr>
-        <p:txBody>
-          <a:bodyPr vert="horz" lIns="91440" tIns="45720" rIns="91440" bIns="45720" rtlCol="0"/>
-          <a:lstStyle>
-            <a:lvl1pPr algn="r">
-              <a:defRPr sz="1200"/>
-            </a:lvl1pPr>
-          </a:lstStyle>
-          <a:p>
-            <a:fld id="{5282F153-3F37-0F45-9E97-73ACFA13230C}" type="datetimeFigureOut">
-              <a:rPr lang="en-US"/>
-              <a:t>7/23/19</a:t>
-            </a:fld>
-            <a:endParaRPr lang="en-US"/>
-          </a:p>
-        </p:txBody>
-      </p:sp>
-      <p:sp>
-        <p:nvSpPr>
-          <p:cNvPr id="4" name="Slide Image Placeholder 3"/>
-          <p:cNvSpPr>
-            <a:spLocks noGrp="1" noRot="1" noChangeAspect="1"/>
-          </p:cNvSpPr>
-          <p:nvPr>
-            <p:ph type="sldImg" idx="2"/>
-          </p:nvPr>
-        </p:nvSpPr>
-        <p:spPr>
-          <a:xfrm>
-            <a:off x="685800" y="1143000"/>
-            <a:ext cx="5486400" cy="3086100"/>
-          </a:xfrm>
-          <a:prstGeom prst="rect">
-            <a:avLst/>
-          </a:prstGeom>
-          <a:noFill/>
-          <a:ln w="12700">
-            <a:solidFill>
-              <a:prstClr val="black"/>
-            </a:solidFill>
-          </a:ln>
-        </p:spPr>
-        <p:txBody>
-          <a:bodyPr vert="horz" lIns="91440" tIns="45720" rIns="91440" bIns="45720" rtlCol="0" anchor="ctr"/>
-          <a:lstStyle/>
-          <a:p>
-            <a:endParaRPr lang="en-US"/>
-          </a:p>
-        </p:txBody>
-      </p:sp>
-      <p:sp>
-        <p:nvSpPr>
-          <p:cNvPr id="5" name="Notes Placeholder 4"/>
-          <p:cNvSpPr>
-            <a:spLocks noGrp="1"/>
-          </p:cNvSpPr>
-          <p:nvPr>
-            <p:ph type="body" sz="quarter" idx="3"/>
-          </p:nvPr>
-        </p:nvSpPr>
-        <p:spPr>
-          <a:xfrm>
-            <a:off x="685800" y="4400550"/>
-            <a:ext cx="5486400" cy="3600450"/>
-          </a:xfrm>
-          <a:prstGeom prst="rect">
-            <a:avLst/>
-          </a:prstGeom>
-        </p:spPr>
-        <p:txBody>
-          <a:bodyPr vert="horz" lIns="91440" tIns="45720" rIns="91440" bIns="45720" rtlCol="0"/>
-          <a:lstStyle/>
-          <a:p>
-            <a:pPr lvl="0"/>
-            <a:r>
-              <a:rPr lang="en-US"/>
-              <a:t>Click to edit Master text styles</a:t>
-            </a:r>
-          </a:p>
-          <a:p>
-            <a:pPr lvl="1"/>
-            <a:r>
-              <a:rPr lang="en-US"/>
-              <a:t>Second level</a:t>
-            </a:r>
-          </a:p>
-          <a:p>
-            <a:pPr lvl="2"/>
-            <a:r>
-              <a:rPr lang="en-US"/>
-              <a:t>Third level</a:t>
-            </a:r>
-          </a:p>
-          <a:p>
-            <a:pPr lvl="3"/>
-            <a:r>
-              <a:rPr lang="en-US"/>
-              <a:t>Fourth level</a:t>
-            </a:r>
-          </a:p>
-          <a:p>
-            <a:pPr lvl="4"/>
-            <a:r>
-              <a:rPr lang="en-US"/>
-              <a:t>Fifth level</a:t>
-            </a:r>
-          </a:p>
-        </p:txBody>
-      </p:sp>
-      <p:sp>
-        <p:nvSpPr>
-          <p:cNvPr id="6" name="Footer Placeholder 5"/>
-          <p:cNvSpPr>
-            <a:spLocks noGrp="1"/>
-          </p:cNvSpPr>
-          <p:nvPr>
-            <p:ph type="ftr" sz="quarter" idx="4"/>
-          </p:nvPr>
-        </p:nvSpPr>
-        <p:spPr>
-          <a:xfrm>
-            <a:off x="0" y="8685213"/>
-            <a:ext cx="2971800" cy="458787"/>
-          </a:xfrm>
-          <a:prstGeom prst="rect">
-            <a:avLst/>
-          </a:prstGeom>
-        </p:spPr>
-        <p:txBody>
-          <a:bodyPr vert="horz" lIns="91440" tIns="45720" rIns="91440" bIns="45720" rtlCol="0" anchor="b"/>
-          <a:lstStyle>
-            <a:lvl1pPr algn="l">
-              <a:defRPr sz="1200"/>
-            </a:lvl1pPr>
-          </a:lstStyle>
-          <a:p>
-            <a:endParaRPr lang="en-US"/>
-          </a:p>
-        </p:txBody>
-      </p:sp>
-      <p:sp>
-        <p:nvSpPr>
-          <p:cNvPr id="7" name="Slide Number Placeholder 6"/>
-          <p:cNvSpPr>
-            <a:spLocks noGrp="1"/>
-          </p:cNvSpPr>
-          <p:nvPr>
-            <p:ph type="sldNum" sz="quarter" idx="5"/>
-          </p:nvPr>
-        </p:nvSpPr>
-        <p:spPr>
-          <a:xfrm>
-            <a:off x="3884613" y="8685213"/>
-            <a:ext cx="2971800" cy="458787"/>
-          </a:xfrm>
-          <a:prstGeom prst="rect">
-            <a:avLst/>
-          </a:prstGeom>
-        </p:spPr>
-        <p:txBody>
-          <a:bodyPr vert="horz" lIns="91440" tIns="45720" rIns="91440" bIns="45720" rtlCol="0" anchor="b"/>
-          <a:lstStyle>
-            <a:lvl1pPr algn="r">
-              <a:defRPr sz="1200"/>
-            </a:lvl1pPr>
-          </a:lstStyle>
-          <a:p>
-            <a:fld id="{CE5E9CC1-C706-0F49-92D6-E571CC5EEA8F}" type="slidenum">
-              <a:rPr lang="en-US"/>
-              <a:t>‹#›</a:t>
-            </a:fld>
-            <a:endParaRPr lang="en-US"/>
-          </a:p>
-        </p:txBody>
-      </p:sp>
     </p:spTree>
     <p:extLst>
       <p:ext uri="{BB962C8B-B14F-4D97-AF65-F5344CB8AC3E}">
-        <p14:creationId xmlns:p14="http://schemas.microsoft.com/office/powerpoint/2010/main" val="1024086991"/>
+        <p14:creationId xmlns:p14="http://schemas.microsoft.com/office/powerpoint/2010/main" val="1916531973"/>
       </p:ext>
     </p:extLst>
   </p:cSld>
@@ -508,10 +289,6 @@
           <a:bodyPr/>
           <a:lstStyle/>
           <a:p>
-            <a:r>
-              <a:rPr lang="en-US" dirty="0"/>
-              <a:t/>
-            </a:r>
             <a:endParaRPr lang="en-US" dirty="0"/>
           </a:p>
         </p:txBody>
@@ -596,10 +373,6 @@
           <a:bodyPr/>
           <a:lstStyle/>
           <a:p>
-            <a:r>
-              <a:rPr lang="en-US" dirty="0"/>
-              <a:t/>
-            </a:r>
             <a:endParaRPr lang="en-US" dirty="0"/>
           </a:p>
         </p:txBody>
@@ -684,10 +457,6 @@
           <a:bodyPr/>
           <a:lstStyle/>
           <a:p>
-            <a:r>
-              <a:rPr lang="en-US" dirty="0"/>
-              <a:t/>
-            </a:r>
             <a:endParaRPr lang="en-US" dirty="0"/>
           </a:p>
         </p:txBody>
@@ -772,10 +541,6 @@
           <a:bodyPr/>
           <a:lstStyle/>
           <a:p>
-            <a:r>
-              <a:rPr lang="en-US" dirty="0"/>
-              <a:t/>
-            </a:r>
             <a:endParaRPr lang="en-US" dirty="0"/>
           </a:p>
         </p:txBody>
@@ -860,10 +625,6 @@
           <a:bodyPr/>
           <a:lstStyle/>
           <a:p>
-            <a:r>
-              <a:rPr lang="en-US" dirty="0"/>
-              <a:t/>
-            </a:r>
             <a:endParaRPr lang="en-US" dirty="0"/>
           </a:p>
         </p:txBody>
@@ -948,10 +709,6 @@
           <a:bodyPr/>
           <a:lstStyle/>
           <a:p>
-            <a:r>
-              <a:rPr lang="en-US" dirty="0"/>
-              <a:t/>
-            </a:r>
             <a:endParaRPr lang="en-US" dirty="0"/>
           </a:p>
         </p:txBody>
@@ -1036,10 +793,6 @@
           <a:bodyPr/>
           <a:lstStyle/>
           <a:p>
-            <a:r>
-              <a:rPr lang="en-US" dirty="0"/>
-              <a:t/>
-            </a:r>
             <a:endParaRPr lang="en-US" dirty="0"/>
           </a:p>
         </p:txBody>
@@ -1124,10 +877,6 @@
           <a:bodyPr/>
           <a:lstStyle/>
           <a:p>
-            <a:r>
-              <a:rPr lang="en-US" dirty="0"/>
-              <a:t/>
-            </a:r>
             <a:endParaRPr lang="en-US" dirty="0"/>
           </a:p>
         </p:txBody>
@@ -1212,10 +961,6 @@
           <a:bodyPr/>
           <a:lstStyle/>
           <a:p>
-            <a:r>
-              <a:rPr lang="en-US" dirty="0"/>
-              <a:t/>
-            </a:r>
             <a:endParaRPr lang="en-US" dirty="0"/>
           </a:p>
         </p:txBody>
@@ -1289,6 +1034,11 @@
 <file path=ppt/slideMasters/slideMaster1.xml><?xml version="1.0" encoding="utf-8"?>
 <p:sldMaster xmlns:a="http://schemas.openxmlformats.org/drawingml/2006/main" xmlns:r="http://schemas.openxmlformats.org/officeDocument/2006/relationships" xmlns:p="http://schemas.openxmlformats.org/presentationml/2006/main">
   <p:cSld>
+    <p:bg>
+      <p:bgRef idx="1001">
+        <a:schemeClr val="bg1"/>
+      </p:bgRef>
+    </p:bg>
     <p:spTree>
       <p:nvGrpSpPr>
         <p:cNvPr id="1" name=""/>
@@ -1571,6 +1321,7 @@
         <a:solidFill>
           <a:srgbClr val="FAFAF7"/>
         </a:solidFill>
+        <a:effectLst/>
       </p:bgPr>
     </p:bg>
     <p:spTree>
@@ -1611,6 +1362,13 @@
             <a:prstDash val="solid"/>
           </a:ln>
         </p:spPr>
+        <p:txBody>
+          <a:bodyPr/>
+          <a:lstStyle/>
+          <a:p>
+            <a:endParaRPr lang="en-GB"/>
+          </a:p>
+        </p:txBody>
       </p:sp>
       <p:sp>
         <p:nvSpPr>
@@ -1636,6 +1394,13 @@
             <a:prstDash val="solid"/>
           </a:ln>
         </p:spPr>
+        <p:txBody>
+          <a:bodyPr/>
+          <a:lstStyle/>
+          <a:p>
+            <a:endParaRPr lang="en-GB"/>
+          </a:p>
+        </p:txBody>
       </p:sp>
       <p:sp>
         <p:nvSpPr>
@@ -1658,7 +1423,7 @@
           <a:bodyPr wrap="square" rtlCol="0" anchor="t"/>
           <a:lstStyle/>
           <a:p>
-            <a:pPr indent="0" marL="0">
+            <a:pPr marL="0" indent="0">
               <a:buNone/>
             </a:pPr>
             <a:r>
@@ -1697,7 +1462,7 @@
           <a:bodyPr wrap="square" rtlCol="0" anchor="ctr"/>
           <a:lstStyle/>
           <a:p>
-            <a:pPr indent="0" marL="0">
+            <a:pPr marL="0" indent="0">
               <a:buNone/>
             </a:pPr>
             <a:r>
@@ -1737,6 +1502,13 @@
             <a:prstDash val="solid"/>
           </a:ln>
         </p:spPr>
+        <p:txBody>
+          <a:bodyPr/>
+          <a:lstStyle/>
+          <a:p>
+            <a:endParaRPr lang="en-GB"/>
+          </a:p>
+        </p:txBody>
       </p:sp>
       <p:sp>
         <p:nvSpPr>
@@ -1759,7 +1531,7 @@
           <a:bodyPr wrap="square" rtlCol="0" anchor="ctr"/>
           <a:lstStyle/>
           <a:p>
-            <a:pPr indent="0" marL="0">
+            <a:pPr marL="0" indent="0">
               <a:buNone/>
             </a:pPr>
             <a:r>
@@ -1798,7 +1570,7 @@
           <a:bodyPr wrap="square" rtlCol="0" anchor="ctr"/>
           <a:lstStyle/>
           <a:p>
-            <a:pPr indent="0" marL="0">
+            <a:pPr marL="0" indent="0">
               <a:buNone/>
             </a:pPr>
             <a:r>
@@ -1840,6 +1612,13 @@
             <a:prstDash val="solid"/>
           </a:ln>
         </p:spPr>
+        <p:txBody>
+          <a:bodyPr/>
+          <a:lstStyle/>
+          <a:p>
+            <a:endParaRPr lang="en-GB"/>
+          </a:p>
+        </p:txBody>
       </p:sp>
       <p:sp>
         <p:nvSpPr>
@@ -1862,7 +1641,7 @@
           <a:bodyPr wrap="square" lIns="0" tIns="0" rIns="0" bIns="0" rtlCol="0" anchor="b"/>
           <a:lstStyle/>
           <a:p>
-            <a:pPr algn="ctr" indent="0" marL="0">
+            <a:pPr marL="0" indent="0" algn="ctr">
               <a:buNone/>
             </a:pPr>
             <a:r>
@@ -1901,7 +1680,7 @@
           <a:bodyPr wrap="square" lIns="0" tIns="0" rIns="0" bIns="0" rtlCol="0" anchor="t"/>
           <a:lstStyle/>
           <a:p>
-            <a:pPr algn="ctr" indent="0" marL="0">
+            <a:pPr marL="0" indent="0" algn="ctr">
               <a:buNone/>
             </a:pPr>
             <a:r>
@@ -1943,6 +1722,13 @@
             <a:prstDash val="solid"/>
           </a:ln>
         </p:spPr>
+        <p:txBody>
+          <a:bodyPr/>
+          <a:lstStyle/>
+          <a:p>
+            <a:endParaRPr lang="en-GB"/>
+          </a:p>
+        </p:txBody>
       </p:sp>
       <p:sp>
         <p:nvSpPr>
@@ -1965,7 +1751,7 @@
           <a:bodyPr wrap="square" lIns="0" tIns="0" rIns="0" bIns="0" rtlCol="0" anchor="b"/>
           <a:lstStyle/>
           <a:p>
-            <a:pPr algn="ctr" indent="0" marL="0">
+            <a:pPr marL="0" indent="0" algn="ctr">
               <a:buNone/>
             </a:pPr>
             <a:r>
@@ -1977,7 +1763,7 @@
                 <a:ea typeface="Arial" pitchFamily="34" charset="-122"/>
                 <a:cs typeface="Arial" pitchFamily="34" charset="-120"/>
               </a:rPr>
-              <a:t>221,51 s</a:t>
+              <a:t>221,51</a:t>
             </a:r>
             <a:endParaRPr lang="en-US" sz="3600" dirty="0"/>
           </a:p>
@@ -2004,7 +1790,7 @@
           <a:bodyPr wrap="square" lIns="0" tIns="0" rIns="0" bIns="0" rtlCol="0" anchor="t"/>
           <a:lstStyle/>
           <a:p>
-            <a:pPr algn="ctr" indent="0" marL="0">
+            <a:pPr marL="0" indent="0" algn="ctr">
               <a:buNone/>
             </a:pPr>
             <a:r>
@@ -2046,6 +1832,13 @@
             <a:prstDash val="solid"/>
           </a:ln>
         </p:spPr>
+        <p:txBody>
+          <a:bodyPr/>
+          <a:lstStyle/>
+          <a:p>
+            <a:endParaRPr lang="en-GB"/>
+          </a:p>
+        </p:txBody>
       </p:sp>
       <p:sp>
         <p:nvSpPr>
@@ -2068,7 +1861,7 @@
           <a:bodyPr wrap="square" lIns="0" tIns="0" rIns="0" bIns="0" rtlCol="0" anchor="b"/>
           <a:lstStyle/>
           <a:p>
-            <a:pPr algn="ctr" indent="0" marL="0">
+            <a:pPr marL="0" indent="0" algn="ctr">
               <a:buNone/>
             </a:pPr>
             <a:r>
@@ -2107,9 +1900,20 @@
           <a:bodyPr wrap="square" lIns="0" tIns="0" rIns="0" bIns="0" rtlCol="0" anchor="t"/>
           <a:lstStyle/>
           <a:p>
-            <a:pPr algn="ctr" indent="0" marL="0">
-              <a:buNone/>
-            </a:pPr>
+            <a:pPr marL="0" indent="0" algn="ctr">
+              <a:buNone/>
+            </a:pPr>
+            <a:r>
+              <a:rPr lang="en-US" sz="1100" dirty="0" err="1">
+                <a:solidFill>
+                  <a:srgbClr val="FFFFFF"/>
+                </a:solidFill>
+                <a:latin typeface="Arial" pitchFamily="34" charset="0"/>
+                <a:ea typeface="Arial" pitchFamily="34" charset="-122"/>
+                <a:cs typeface="Arial" pitchFamily="34" charset="-120"/>
+              </a:rPr>
+              <a:t>réfutées</a:t>
+            </a:r>
             <a:r>
               <a:rPr lang="en-US" sz="1100" dirty="0">
                 <a:solidFill>
@@ -2119,7 +1923,29 @@
                 <a:ea typeface="Arial" pitchFamily="34" charset="-122"/>
                 <a:cs typeface="Arial" pitchFamily="34" charset="-120"/>
               </a:rPr>
-              <a:t>réfutées en &lt; 1 s</a:t>
+              <a:t> </a:t>
+            </a:r>
+            <a:r>
+              <a:rPr lang="en-US" sz="1100" dirty="0" err="1">
+                <a:solidFill>
+                  <a:srgbClr val="FFFFFF"/>
+                </a:solidFill>
+                <a:latin typeface="Arial" pitchFamily="34" charset="0"/>
+                <a:ea typeface="Arial" pitchFamily="34" charset="-122"/>
+                <a:cs typeface="Arial" pitchFamily="34" charset="-120"/>
+              </a:rPr>
+              <a:t>en</a:t>
+            </a:r>
+            <a:r>
+              <a:rPr lang="en-US" sz="1100" dirty="0">
+                <a:solidFill>
+                  <a:srgbClr val="FFFFFF"/>
+                </a:solidFill>
+                <a:latin typeface="Arial" pitchFamily="34" charset="0"/>
+                <a:ea typeface="Arial" pitchFamily="34" charset="-122"/>
+                <a:cs typeface="Arial" pitchFamily="34" charset="-120"/>
+              </a:rPr>
+              <a:t> &lt; 1 s</a:t>
             </a:r>
             <a:endParaRPr lang="en-US" sz="1100" dirty="0"/>
           </a:p>
@@ -2146,7 +1972,7 @@
           <a:bodyPr wrap="square" rtlCol="0" anchor="ctr"/>
           <a:lstStyle/>
           <a:p>
-            <a:pPr algn="r" indent="0" marL="0">
+            <a:pPr marL="0" indent="0" algn="r">
               <a:buNone/>
             </a:pPr>
             <a:r>
@@ -2180,6 +2006,7 @@
         <a:solidFill>
           <a:srgbClr val="FAFAF7"/>
         </a:solidFill>
+        <a:effectLst/>
       </p:bgPr>
     </p:bg>
     <p:spTree>
@@ -2220,6 +2047,13 @@
             <a:prstDash val="solid"/>
           </a:ln>
         </p:spPr>
+        <p:txBody>
+          <a:bodyPr/>
+          <a:lstStyle/>
+          <a:p>
+            <a:endParaRPr lang="en-GB"/>
+          </a:p>
+        </p:txBody>
       </p:sp>
       <p:sp>
         <p:nvSpPr>
@@ -2242,7 +2076,7 @@
           <a:bodyPr wrap="square" lIns="0" tIns="0" rIns="0" bIns="0" rtlCol="0" anchor="ctr"/>
           <a:lstStyle/>
           <a:p>
-            <a:pPr indent="0" marL="0">
+            <a:pPr marL="0" indent="0">
               <a:buNone/>
             </a:pPr>
             <a:r>
@@ -2281,7 +2115,7 @@
           <a:bodyPr wrap="square" rtlCol="0" anchor="ctr"/>
           <a:lstStyle/>
           <a:p>
-            <a:pPr algn="r" indent="0" marL="0">
+            <a:pPr marL="0" indent="0" algn="r">
               <a:buNone/>
             </a:pPr>
             <a:r>
@@ -2323,6 +2157,13 @@
             <a:prstDash val="solid"/>
           </a:ln>
         </p:spPr>
+        <p:txBody>
+          <a:bodyPr/>
+          <a:lstStyle/>
+          <a:p>
+            <a:endParaRPr lang="en-GB"/>
+          </a:p>
+        </p:txBody>
       </p:sp>
       <p:sp>
         <p:nvSpPr>
@@ -2345,7 +2186,7 @@
           <a:bodyPr wrap="square" rtlCol="0" anchor="ctr"/>
           <a:lstStyle/>
           <a:p>
-            <a:pPr algn="ctr" indent="0" marL="0">
+            <a:pPr marL="0" indent="0" algn="ctr">
               <a:buNone/>
             </a:pPr>
             <a:r>
@@ -2384,7 +2225,7 @@
           <a:bodyPr wrap="square" rtlCol="0" anchor="ctr"/>
           <a:lstStyle/>
           <a:p>
-            <a:pPr indent="0" marL="0">
+            <a:pPr marL="0" indent="0">
               <a:buNone/>
             </a:pPr>
             <a:r>
@@ -2401,7 +2242,7 @@
             <a:endParaRPr lang="en-US" sz="1400" dirty="0"/>
           </a:p>
           <a:p>
-            <a:pPr indent="0" marL="0">
+            <a:pPr marL="0" indent="0">
               <a:buNone/>
             </a:pPr>
             <a:r>
@@ -2441,6 +2282,13 @@
             <a:prstDash val="solid"/>
           </a:ln>
         </p:spPr>
+        <p:txBody>
+          <a:bodyPr/>
+          <a:lstStyle/>
+          <a:p>
+            <a:endParaRPr lang="en-GB"/>
+          </a:p>
+        </p:txBody>
       </p:sp>
       <p:sp>
         <p:nvSpPr>
@@ -2463,7 +2311,7 @@
           <a:bodyPr wrap="square" rtlCol="0" anchor="ctr"/>
           <a:lstStyle/>
           <a:p>
-            <a:pPr indent="0" marL="0">
+            <a:pPr marL="0" indent="0">
               <a:buNone/>
             </a:pPr>
             <a:r>
@@ -2505,6 +2353,13 @@
             <a:prstDash val="solid"/>
           </a:ln>
         </p:spPr>
+        <p:txBody>
+          <a:bodyPr/>
+          <a:lstStyle/>
+          <a:p>
+            <a:endParaRPr lang="en-GB"/>
+          </a:p>
+        </p:txBody>
       </p:sp>
       <p:sp>
         <p:nvSpPr>
@@ -2527,7 +2382,7 @@
           <a:bodyPr wrap="square" rtlCol="0" anchor="ctr"/>
           <a:lstStyle/>
           <a:p>
-            <a:pPr algn="ctr" indent="0" marL="0">
+            <a:pPr marL="0" indent="0" algn="ctr">
               <a:buNone/>
             </a:pPr>
             <a:r>
@@ -2544,7 +2399,7 @@
             <a:endParaRPr lang="en-US" sz="1400" dirty="0"/>
           </a:p>
           <a:p>
-            <a:pPr algn="ctr" indent="0" marL="0">
+            <a:pPr marL="0" indent="0" algn="ctr">
               <a:buNone/>
             </a:pPr>
             <a:r>
@@ -2583,7 +2438,7 @@
           <a:bodyPr wrap="square" rtlCol="0" anchor="ctr"/>
           <a:lstStyle/>
           <a:p>
-            <a:pPr indent="0" marL="0">
+            <a:pPr marL="0" indent="0">
               <a:buNone/>
             </a:pPr>
             <a:r>
@@ -2617,6 +2472,7 @@
         <a:solidFill>
           <a:srgbClr val="FAFAF7"/>
         </a:solidFill>
+        <a:effectLst/>
       </p:bgPr>
     </p:bg>
     <p:spTree>
@@ -2657,6 +2513,13 @@
             <a:prstDash val="solid"/>
           </a:ln>
         </p:spPr>
+        <p:txBody>
+          <a:bodyPr/>
+          <a:lstStyle/>
+          <a:p>
+            <a:endParaRPr lang="en-GB"/>
+          </a:p>
+        </p:txBody>
       </p:sp>
       <p:sp>
         <p:nvSpPr>
@@ -2679,7 +2542,7 @@
           <a:bodyPr wrap="square" lIns="0" tIns="0" rIns="0" bIns="0" rtlCol="0" anchor="ctr"/>
           <a:lstStyle/>
           <a:p>
-            <a:pPr indent="0" marL="0">
+            <a:pPr marL="0" indent="0">
               <a:buNone/>
             </a:pPr>
             <a:r>
@@ -2718,7 +2581,7 @@
           <a:bodyPr wrap="square" rtlCol="0" anchor="ctr"/>
           <a:lstStyle/>
           <a:p>
-            <a:pPr algn="r" indent="0" marL="0">
+            <a:pPr marL="0" indent="0" algn="r">
               <a:buNone/>
             </a:pPr>
             <a:r>
@@ -2760,6 +2623,13 @@
             <a:prstDash val="solid"/>
           </a:ln>
         </p:spPr>
+        <p:txBody>
+          <a:bodyPr/>
+          <a:lstStyle/>
+          <a:p>
+            <a:endParaRPr lang="en-GB"/>
+          </a:p>
+        </p:txBody>
       </p:sp>
       <p:sp>
         <p:nvSpPr>
@@ -2782,7 +2652,7 @@
           <a:bodyPr wrap="square" lIns="0" tIns="0" rIns="0" bIns="0" rtlCol="0" anchor="ctr"/>
           <a:lstStyle/>
           <a:p>
-            <a:pPr algn="ctr" indent="0" marL="0">
+            <a:pPr marL="0" indent="0" algn="ctr">
               <a:buNone/>
             </a:pPr>
             <a:r>
@@ -2824,6 +2694,13 @@
             <a:prstDash val="solid"/>
           </a:ln>
         </p:spPr>
+        <p:txBody>
+          <a:bodyPr/>
+          <a:lstStyle/>
+          <a:p>
+            <a:endParaRPr lang="en-GB"/>
+          </a:p>
+        </p:txBody>
       </p:sp>
       <p:sp>
         <p:nvSpPr>
@@ -2846,7 +2723,7 @@
           <a:bodyPr wrap="square" lIns="0" tIns="0" rIns="0" bIns="0" rtlCol="0" anchor="ctr"/>
           <a:lstStyle/>
           <a:p>
-            <a:pPr algn="ctr" indent="0" marL="0">
+            <a:pPr marL="0" indent="0" algn="ctr">
               <a:buNone/>
             </a:pPr>
             <a:r>
@@ -2888,6 +2765,13 @@
             <a:prstDash val="solid"/>
           </a:ln>
         </p:spPr>
+        <p:txBody>
+          <a:bodyPr/>
+          <a:lstStyle/>
+          <a:p>
+            <a:endParaRPr lang="en-GB"/>
+          </a:p>
+        </p:txBody>
       </p:sp>
       <p:sp>
         <p:nvSpPr>
@@ -2910,7 +2794,7 @@
           <a:bodyPr wrap="square" lIns="0" tIns="0" rIns="0" bIns="0" rtlCol="0" anchor="ctr"/>
           <a:lstStyle/>
           <a:p>
-            <a:pPr algn="ctr" indent="0" marL="0">
+            <a:pPr marL="0" indent="0" algn="ctr">
               <a:buNone/>
             </a:pPr>
             <a:r>
@@ -2949,7 +2833,7 @@
           <a:bodyPr wrap="square" rtlCol="0" anchor="t"/>
           <a:lstStyle/>
           <a:p>
-            <a:pPr indent="0" marL="0">
+            <a:pPr marL="0" indent="0">
               <a:buNone/>
             </a:pPr>
             <a:r>
@@ -2991,6 +2875,13 @@
             <a:prstDash val="solid"/>
           </a:ln>
         </p:spPr>
+        <p:txBody>
+          <a:bodyPr/>
+          <a:lstStyle/>
+          <a:p>
+            <a:endParaRPr lang="en-GB"/>
+          </a:p>
+        </p:txBody>
       </p:sp>
       <p:sp>
         <p:nvSpPr>
@@ -3013,7 +2904,7 @@
           <a:bodyPr wrap="square" lIns="0" tIns="0" rIns="0" bIns="0" rtlCol="0" anchor="ctr"/>
           <a:lstStyle/>
           <a:p>
-            <a:pPr algn="ctr" indent="0" marL="0">
+            <a:pPr marL="0" indent="0" algn="ctr">
               <a:buNone/>
             </a:pPr>
             <a:r>
@@ -3052,7 +2943,7 @@
           <a:bodyPr wrap="square" rtlCol="0" anchor="t"/>
           <a:lstStyle/>
           <a:p>
-            <a:pPr indent="0" marL="0">
+            <a:pPr marL="0" indent="0">
               <a:buNone/>
             </a:pPr>
             <a:r>
@@ -3094,6 +2985,13 @@
             <a:prstDash val="solid"/>
           </a:ln>
         </p:spPr>
+        <p:txBody>
+          <a:bodyPr/>
+          <a:lstStyle/>
+          <a:p>
+            <a:endParaRPr lang="en-GB"/>
+          </a:p>
+        </p:txBody>
       </p:sp>
       <p:sp>
         <p:nvSpPr>
@@ -3116,7 +3014,7 @@
           <a:bodyPr wrap="square" lIns="0" tIns="0" rIns="0" bIns="0" rtlCol="0" anchor="ctr"/>
           <a:lstStyle/>
           <a:p>
-            <a:pPr algn="ctr" indent="0" marL="0">
+            <a:pPr marL="0" indent="0" algn="ctr">
               <a:buNone/>
             </a:pPr>
             <a:r>
@@ -3155,7 +3053,7 @@
           <a:bodyPr wrap="square" rtlCol="0" anchor="t"/>
           <a:lstStyle/>
           <a:p>
-            <a:pPr indent="0" marL="0">
+            <a:pPr marL="0" indent="0">
               <a:buNone/>
             </a:pPr>
             <a:r>
@@ -3197,6 +3095,13 @@
             <a:prstDash val="solid"/>
           </a:ln>
         </p:spPr>
+        <p:txBody>
+          <a:bodyPr/>
+          <a:lstStyle/>
+          <a:p>
+            <a:endParaRPr lang="en-GB"/>
+          </a:p>
+        </p:txBody>
       </p:sp>
       <p:sp>
         <p:nvSpPr>
@@ -3219,7 +3124,7 @@
           <a:bodyPr wrap="square" lIns="0" tIns="0" rIns="0" bIns="0" rtlCol="0" anchor="ctr"/>
           <a:lstStyle/>
           <a:p>
-            <a:pPr algn="ctr" indent="0" marL="0">
+            <a:pPr marL="0" indent="0" algn="ctr">
               <a:buNone/>
             </a:pPr>
             <a:r>
@@ -3258,7 +3163,7 @@
           <a:bodyPr wrap="square" rtlCol="0" anchor="t"/>
           <a:lstStyle/>
           <a:p>
-            <a:pPr indent="0" marL="0">
+            <a:pPr marL="0" indent="0">
               <a:buNone/>
             </a:pPr>
             <a:r>
@@ -3300,6 +3205,13 @@
             <a:prstDash val="solid"/>
           </a:ln>
         </p:spPr>
+        <p:txBody>
+          <a:bodyPr/>
+          <a:lstStyle/>
+          <a:p>
+            <a:endParaRPr lang="en-GB"/>
+          </a:p>
+        </p:txBody>
       </p:sp>
       <p:sp>
         <p:nvSpPr>
@@ -3322,7 +3234,7 @@
           <a:bodyPr wrap="square" lIns="0" tIns="0" rIns="0" bIns="0" rtlCol="0" anchor="ctr"/>
           <a:lstStyle/>
           <a:p>
-            <a:pPr algn="ctr" indent="0" marL="0">
+            <a:pPr marL="0" indent="0" algn="ctr">
               <a:buNone/>
             </a:pPr>
             <a:r>
@@ -3361,7 +3273,7 @@
           <a:bodyPr wrap="square" rtlCol="0" anchor="t"/>
           <a:lstStyle/>
           <a:p>
-            <a:pPr indent="0" marL="0">
+            <a:pPr marL="0" indent="0">
               <a:buNone/>
             </a:pPr>
             <a:r>
@@ -3403,6 +3315,13 @@
             <a:prstDash val="solid"/>
           </a:ln>
         </p:spPr>
+        <p:txBody>
+          <a:bodyPr/>
+          <a:lstStyle/>
+          <a:p>
+            <a:endParaRPr lang="en-GB"/>
+          </a:p>
+        </p:txBody>
       </p:sp>
       <p:sp>
         <p:nvSpPr>
@@ -3425,7 +3344,7 @@
           <a:bodyPr wrap="square" lIns="0" tIns="0" rIns="0" bIns="0" rtlCol="0" anchor="ctr"/>
           <a:lstStyle/>
           <a:p>
-            <a:pPr algn="ctr" indent="0" marL="0">
+            <a:pPr marL="0" indent="0" algn="ctr">
               <a:buNone/>
             </a:pPr>
             <a:r>
@@ -3464,7 +3383,7 @@
           <a:bodyPr wrap="square" rtlCol="0" anchor="t"/>
           <a:lstStyle/>
           <a:p>
-            <a:pPr indent="0" marL="0">
+            <a:pPr marL="0" indent="0">
               <a:buNone/>
             </a:pPr>
             <a:r>
@@ -3504,6 +3423,13 @@
             <a:prstDash val="solid"/>
           </a:ln>
         </p:spPr>
+        <p:txBody>
+          <a:bodyPr/>
+          <a:lstStyle/>
+          <a:p>
+            <a:endParaRPr lang="en-GB"/>
+          </a:p>
+        </p:txBody>
       </p:sp>
     </p:spTree>
   </p:cSld>
@@ -3521,6 +3447,7 @@
         <a:solidFill>
           <a:srgbClr val="FAFAF7"/>
         </a:solidFill>
+        <a:effectLst/>
       </p:bgPr>
     </p:bg>
     <p:spTree>
@@ -3561,6 +3488,13 @@
             <a:prstDash val="solid"/>
           </a:ln>
         </p:spPr>
+        <p:txBody>
+          <a:bodyPr/>
+          <a:lstStyle/>
+          <a:p>
+            <a:endParaRPr lang="en-GB"/>
+          </a:p>
+        </p:txBody>
       </p:sp>
       <p:sp>
         <p:nvSpPr>
@@ -3583,7 +3517,7 @@
           <a:bodyPr wrap="square" lIns="0" tIns="0" rIns="0" bIns="0" rtlCol="0" anchor="ctr"/>
           <a:lstStyle/>
           <a:p>
-            <a:pPr indent="0" marL="0">
+            <a:pPr marL="0" indent="0">
               <a:buNone/>
             </a:pPr>
             <a:r>
@@ -3622,7 +3556,7 @@
           <a:bodyPr wrap="square" rtlCol="0" anchor="ctr"/>
           <a:lstStyle/>
           <a:p>
-            <a:pPr algn="r" indent="0" marL="0">
+            <a:pPr marL="0" indent="0" algn="r">
               <a:buNone/>
             </a:pPr>
             <a:r>
@@ -3664,6 +3598,13 @@
             <a:prstDash val="solid"/>
           </a:ln>
         </p:spPr>
+        <p:txBody>
+          <a:bodyPr/>
+          <a:lstStyle/>
+          <a:p>
+            <a:endParaRPr lang="en-GB"/>
+          </a:p>
+        </p:txBody>
       </p:sp>
       <p:sp>
         <p:nvSpPr>
@@ -3686,7 +3627,7 @@
           <a:bodyPr wrap="square" lIns="0" tIns="0" rIns="0" bIns="0" rtlCol="0" anchor="b"/>
           <a:lstStyle/>
           <a:p>
-            <a:pPr algn="ctr" indent="0" marL="0">
+            <a:pPr marL="0" indent="0" algn="ctr">
               <a:buNone/>
             </a:pPr>
             <a:r>
@@ -3725,7 +3666,7 @@
           <a:bodyPr wrap="square" lIns="0" tIns="0" rIns="0" bIns="0" rtlCol="0" anchor="t"/>
           <a:lstStyle/>
           <a:p>
-            <a:pPr algn="ctr" indent="0" marL="0">
+            <a:pPr marL="0" indent="0" algn="ctr">
               <a:buNone/>
             </a:pPr>
             <a:r>
@@ -3764,7 +3705,7 @@
           <a:bodyPr wrap="square" rtlCol="0" anchor="ctr"/>
           <a:lstStyle/>
           <a:p>
-            <a:pPr indent="0" marL="0">
+            <a:pPr marL="0" indent="0">
               <a:buNone/>
             </a:pPr>
             <a:r>
@@ -3806,6 +3747,13 @@
             <a:prstDash val="solid"/>
           </a:ln>
         </p:spPr>
+        <p:txBody>
+          <a:bodyPr/>
+          <a:lstStyle/>
+          <a:p>
+            <a:endParaRPr lang="en-GB"/>
+          </a:p>
+        </p:txBody>
       </p:sp>
       <p:sp>
         <p:nvSpPr>
@@ -3828,7 +3776,7 @@
           <a:bodyPr wrap="square" rtlCol="0" anchor="ctr"/>
           <a:lstStyle/>
           <a:p>
-            <a:pPr indent="0" marL="0">
+            <a:pPr marL="0" indent="0">
               <a:buNone/>
             </a:pPr>
             <a:r>
@@ -3870,6 +3818,13 @@
             <a:prstDash val="solid"/>
           </a:ln>
         </p:spPr>
+        <p:txBody>
+          <a:bodyPr/>
+          <a:lstStyle/>
+          <a:p>
+            <a:endParaRPr lang="en-GB"/>
+          </a:p>
+        </p:txBody>
       </p:sp>
       <p:sp>
         <p:nvSpPr>
@@ -3892,7 +3847,7 @@
           <a:bodyPr wrap="square" rtlCol="0" anchor="ctr"/>
           <a:lstStyle/>
           <a:p>
-            <a:pPr indent="0" marL="0">
+            <a:pPr marL="0" indent="0">
               <a:buNone/>
             </a:pPr>
             <a:r>
@@ -3934,6 +3889,13 @@
             <a:prstDash val="solid"/>
           </a:ln>
         </p:spPr>
+        <p:txBody>
+          <a:bodyPr/>
+          <a:lstStyle/>
+          <a:p>
+            <a:endParaRPr lang="en-GB"/>
+          </a:p>
+        </p:txBody>
       </p:sp>
       <p:sp>
         <p:nvSpPr>
@@ -3956,7 +3918,7 @@
           <a:bodyPr wrap="square" rtlCol="0" anchor="ctr"/>
           <a:lstStyle/>
           <a:p>
-            <a:pPr indent="0" marL="0">
+            <a:pPr marL="0" indent="0">
               <a:buNone/>
             </a:pPr>
             <a:r>
@@ -3982,7 +3944,7 @@
         </p:nvSpPr>
         <p:spPr>
           <a:xfrm>
-            <a:off x="457200" y="2880360"/>
+            <a:off x="457200" y="3056207"/>
             <a:ext cx="8412480" cy="0"/>
           </a:xfrm>
           <a:prstGeom prst="line">
@@ -3996,6 +3958,13 @@
             <a:prstDash val="solid"/>
           </a:ln>
         </p:spPr>
+        <p:txBody>
+          <a:bodyPr/>
+          <a:lstStyle/>
+          <a:p>
+            <a:endParaRPr lang="en-GB"/>
+          </a:p>
+        </p:txBody>
       </p:sp>
       <p:sp>
         <p:nvSpPr>
@@ -4018,7 +3987,7 @@
           <a:bodyPr wrap="square" rtlCol="0" anchor="ctr"/>
           <a:lstStyle/>
           <a:p>
-            <a:pPr indent="0" marL="0">
+            <a:pPr marL="0" indent="0">
               <a:buNone/>
             </a:pPr>
             <a:r>
@@ -4057,7 +4026,7 @@
           <a:bodyPr wrap="square" rtlCol="0" anchor="ctr"/>
           <a:lstStyle/>
           <a:p>
-            <a:pPr indent="0" marL="0">
+            <a:pPr marL="0" indent="0">
               <a:buNone/>
             </a:pPr>
             <a:r>
@@ -4099,6 +4068,13 @@
             <a:prstDash val="solid"/>
           </a:ln>
         </p:spPr>
+        <p:txBody>
+          <a:bodyPr/>
+          <a:lstStyle/>
+          <a:p>
+            <a:endParaRPr lang="en-GB"/>
+          </a:p>
+        </p:txBody>
       </p:sp>
       <p:sp>
         <p:nvSpPr>
@@ -4124,6 +4100,13 @@
             <a:prstDash val="solid"/>
           </a:ln>
         </p:spPr>
+        <p:txBody>
+          <a:bodyPr/>
+          <a:lstStyle/>
+          <a:p>
+            <a:endParaRPr lang="en-GB"/>
+          </a:p>
+        </p:txBody>
       </p:sp>
       <p:sp>
         <p:nvSpPr>
@@ -4146,7 +4129,7 @@
           <a:bodyPr wrap="square" lIns="0" tIns="0" rIns="0" bIns="0" rtlCol="0" anchor="ctr"/>
           <a:lstStyle/>
           <a:p>
-            <a:pPr algn="ctr" indent="0" marL="0">
+            <a:pPr marL="0" indent="0" algn="ctr">
               <a:buNone/>
             </a:pPr>
             <a:r>
@@ -4185,7 +4168,7 @@
           <a:bodyPr wrap="square" lIns="0" tIns="0" rIns="0" bIns="0" rtlCol="0" anchor="ctr"/>
           <a:lstStyle/>
           <a:p>
-            <a:pPr algn="ctr" indent="0" marL="0">
+            <a:pPr marL="0" indent="0" algn="ctr">
               <a:buNone/>
             </a:pPr>
             <a:r>
@@ -4219,6 +4202,7 @@
         <a:solidFill>
           <a:srgbClr val="FAFAF7"/>
         </a:solidFill>
+        <a:effectLst/>
       </p:bgPr>
     </p:bg>
     <p:spTree>
@@ -4259,6 +4243,13 @@
             <a:prstDash val="solid"/>
           </a:ln>
         </p:spPr>
+        <p:txBody>
+          <a:bodyPr/>
+          <a:lstStyle/>
+          <a:p>
+            <a:endParaRPr lang="en-GB"/>
+          </a:p>
+        </p:txBody>
       </p:sp>
       <p:sp>
         <p:nvSpPr>
@@ -4281,7 +4272,7 @@
           <a:bodyPr wrap="square" lIns="0" tIns="0" rIns="0" bIns="0" rtlCol="0" anchor="ctr"/>
           <a:lstStyle/>
           <a:p>
-            <a:pPr indent="0" marL="0">
+            <a:pPr marL="0" indent="0">
               <a:buNone/>
             </a:pPr>
             <a:r>
@@ -4320,7 +4311,7 @@
           <a:bodyPr wrap="square" rtlCol="0" anchor="ctr"/>
           <a:lstStyle/>
           <a:p>
-            <a:pPr algn="r" indent="0" marL="0">
+            <a:pPr marL="0" indent="0" algn="r">
               <a:buNone/>
             </a:pPr>
             <a:r>
@@ -4362,6 +4353,13 @@
             <a:prstDash val="solid"/>
           </a:ln>
         </p:spPr>
+        <p:txBody>
+          <a:bodyPr/>
+          <a:lstStyle/>
+          <a:p>
+            <a:endParaRPr lang="en-GB"/>
+          </a:p>
+        </p:txBody>
       </p:sp>
       <p:sp>
         <p:nvSpPr>
@@ -4387,6 +4385,13 @@
             <a:prstDash val="solid"/>
           </a:ln>
         </p:spPr>
+        <p:txBody>
+          <a:bodyPr/>
+          <a:lstStyle/>
+          <a:p>
+            <a:endParaRPr lang="en-GB"/>
+          </a:p>
+        </p:txBody>
       </p:sp>
       <p:sp>
         <p:nvSpPr>
@@ -4409,7 +4414,7 @@
           <a:bodyPr wrap="square" rtlCol="0" anchor="ctr"/>
           <a:lstStyle/>
           <a:p>
-            <a:pPr indent="0" marL="0">
+            <a:pPr marL="0" indent="0">
               <a:buNone/>
             </a:pPr>
             <a:r>
@@ -4448,7 +4453,7 @@
           <a:bodyPr wrap="square" rtlCol="0" anchor="ctr"/>
           <a:lstStyle/>
           <a:p>
-            <a:pPr indent="0" marL="0">
+            <a:pPr marL="0" indent="0">
               <a:buNone/>
             </a:pPr>
             <a:r>
@@ -4490,6 +4495,13 @@
             <a:prstDash val="solid"/>
           </a:ln>
         </p:spPr>
+        <p:txBody>
+          <a:bodyPr/>
+          <a:lstStyle/>
+          <a:p>
+            <a:endParaRPr lang="en-GB"/>
+          </a:p>
+        </p:txBody>
       </p:sp>
       <p:sp>
         <p:nvSpPr>
@@ -4515,6 +4527,13 @@
             <a:prstDash val="solid"/>
           </a:ln>
         </p:spPr>
+        <p:txBody>
+          <a:bodyPr/>
+          <a:lstStyle/>
+          <a:p>
+            <a:endParaRPr lang="en-GB"/>
+          </a:p>
+        </p:txBody>
       </p:sp>
       <p:sp>
         <p:nvSpPr>
@@ -4537,7 +4556,7 @@
           <a:bodyPr wrap="square" rtlCol="0" anchor="ctr"/>
           <a:lstStyle/>
           <a:p>
-            <a:pPr indent="0" marL="0">
+            <a:pPr marL="0" indent="0">
               <a:buNone/>
             </a:pPr>
             <a:r>
@@ -4576,7 +4595,7 @@
           <a:bodyPr wrap="square" rtlCol="0" anchor="ctr"/>
           <a:lstStyle/>
           <a:p>
-            <a:pPr indent="0" marL="0">
+            <a:pPr marL="0" indent="0">
               <a:buNone/>
             </a:pPr>
             <a:r>
@@ -4618,6 +4637,13 @@
             <a:prstDash val="solid"/>
           </a:ln>
         </p:spPr>
+        <p:txBody>
+          <a:bodyPr/>
+          <a:lstStyle/>
+          <a:p>
+            <a:endParaRPr lang="en-GB"/>
+          </a:p>
+        </p:txBody>
       </p:sp>
       <p:sp>
         <p:nvSpPr>
@@ -4643,6 +4669,13 @@
             <a:prstDash val="solid"/>
           </a:ln>
         </p:spPr>
+        <p:txBody>
+          <a:bodyPr/>
+          <a:lstStyle/>
+          <a:p>
+            <a:endParaRPr lang="en-GB"/>
+          </a:p>
+        </p:txBody>
       </p:sp>
       <p:sp>
         <p:nvSpPr>
@@ -4665,7 +4698,7 @@
           <a:bodyPr wrap="square" rtlCol="0" anchor="ctr"/>
           <a:lstStyle/>
           <a:p>
-            <a:pPr indent="0" marL="0">
+            <a:pPr marL="0" indent="0">
               <a:buNone/>
             </a:pPr>
             <a:r>
@@ -4704,7 +4737,7 @@
           <a:bodyPr wrap="square" rtlCol="0" anchor="ctr"/>
           <a:lstStyle/>
           <a:p>
-            <a:pPr indent="0" marL="0">
+            <a:pPr marL="0" indent="0">
               <a:buNone/>
             </a:pPr>
             <a:r>
@@ -4746,6 +4779,13 @@
             <a:prstDash val="solid"/>
           </a:ln>
         </p:spPr>
+        <p:txBody>
+          <a:bodyPr/>
+          <a:lstStyle/>
+          <a:p>
+            <a:endParaRPr lang="en-GB"/>
+          </a:p>
+        </p:txBody>
       </p:sp>
       <p:sp>
         <p:nvSpPr>
@@ -4771,6 +4811,13 @@
             <a:prstDash val="solid"/>
           </a:ln>
         </p:spPr>
+        <p:txBody>
+          <a:bodyPr/>
+          <a:lstStyle/>
+          <a:p>
+            <a:endParaRPr lang="en-GB"/>
+          </a:p>
+        </p:txBody>
       </p:sp>
       <p:sp>
         <p:nvSpPr>
@@ -4793,7 +4840,7 @@
           <a:bodyPr wrap="square" rtlCol="0" anchor="ctr"/>
           <a:lstStyle/>
           <a:p>
-            <a:pPr indent="0" marL="0">
+            <a:pPr marL="0" indent="0">
               <a:buNone/>
             </a:pPr>
             <a:r>
@@ -4832,7 +4879,7 @@
           <a:bodyPr wrap="square" rtlCol="0" anchor="ctr"/>
           <a:lstStyle/>
           <a:p>
-            <a:pPr indent="0" marL="0">
+            <a:pPr marL="0" indent="0">
               <a:buNone/>
             </a:pPr>
             <a:r>
@@ -4866,6 +4913,7 @@
         <a:solidFill>
           <a:srgbClr val="FAFAF7"/>
         </a:solidFill>
+        <a:effectLst/>
       </p:bgPr>
     </p:bg>
     <p:spTree>
@@ -4906,6 +4954,13 @@
             <a:prstDash val="solid"/>
           </a:ln>
         </p:spPr>
+        <p:txBody>
+          <a:bodyPr/>
+          <a:lstStyle/>
+          <a:p>
+            <a:endParaRPr lang="en-GB"/>
+          </a:p>
+        </p:txBody>
       </p:sp>
       <p:sp>
         <p:nvSpPr>
@@ -4928,7 +4983,7 @@
           <a:bodyPr wrap="square" lIns="0" tIns="0" rIns="0" bIns="0" rtlCol="0" anchor="ctr"/>
           <a:lstStyle/>
           <a:p>
-            <a:pPr indent="0" marL="0">
+            <a:pPr marL="0" indent="0">
               <a:buNone/>
             </a:pPr>
             <a:r>
@@ -4967,7 +5022,7 @@
           <a:bodyPr wrap="square" rtlCol="0" anchor="ctr"/>
           <a:lstStyle/>
           <a:p>
-            <a:pPr algn="r" indent="0" marL="0">
+            <a:pPr marL="0" indent="0" algn="r">
               <a:buNone/>
             </a:pPr>
             <a:r>
@@ -5006,7 +5061,7 @@
           <a:bodyPr wrap="square" rtlCol="0" anchor="ctr"/>
           <a:lstStyle/>
           <a:p>
-            <a:pPr indent="0" marL="0">
+            <a:pPr marL="0" indent="0">
               <a:buNone/>
             </a:pPr>
             <a:r>
@@ -5045,7 +5100,7 @@
           <a:bodyPr wrap="square" rtlCol="0" anchor="ctr"/>
           <a:lstStyle/>
           <a:p>
-            <a:pPr indent="0" marL="0">
+            <a:pPr marL="0" indent="0">
               <a:buNone/>
             </a:pPr>
             <a:r>
@@ -5085,6 +5140,13 @@
             <a:prstDash val="solid"/>
           </a:ln>
         </p:spPr>
+        <p:txBody>
+          <a:bodyPr/>
+          <a:lstStyle/>
+          <a:p>
+            <a:endParaRPr lang="en-GB"/>
+          </a:p>
+        </p:txBody>
       </p:sp>
       <p:sp>
         <p:nvSpPr>
@@ -5107,7 +5169,7 @@
           <a:bodyPr wrap="square" rtlCol="0" anchor="ctr"/>
           <a:lstStyle/>
           <a:p>
-            <a:pPr indent="0" marL="0">
+            <a:pPr marL="0" indent="0">
               <a:buNone/>
             </a:pPr>
             <a:r>
@@ -5149,6 +5211,13 @@
             <a:prstDash val="solid"/>
           </a:ln>
         </p:spPr>
+        <p:txBody>
+          <a:bodyPr/>
+          <a:lstStyle/>
+          <a:p>
+            <a:endParaRPr lang="en-GB"/>
+          </a:p>
+        </p:txBody>
       </p:sp>
       <p:sp>
         <p:nvSpPr>
@@ -5171,7 +5240,7 @@
           <a:bodyPr wrap="square" lIns="0" tIns="0" rIns="0" bIns="0" rtlCol="0" anchor="ctr"/>
           <a:lstStyle/>
           <a:p>
-            <a:pPr algn="ctr" indent="0" marL="0">
+            <a:pPr marL="0" indent="0" algn="ctr">
               <a:buNone/>
             </a:pPr>
             <a:r>
@@ -5210,7 +5279,7 @@
           <a:bodyPr wrap="square" rtlCol="0" anchor="ctr"/>
           <a:lstStyle/>
           <a:p>
-            <a:pPr indent="0" marL="0">
+            <a:pPr marL="0" indent="0">
               <a:buNone/>
             </a:pPr>
             <a:r>
@@ -5252,6 +5321,13 @@
             <a:prstDash val="solid"/>
           </a:ln>
         </p:spPr>
+        <p:txBody>
+          <a:bodyPr/>
+          <a:lstStyle/>
+          <a:p>
+            <a:endParaRPr lang="en-GB"/>
+          </a:p>
+        </p:txBody>
       </p:sp>
       <p:sp>
         <p:nvSpPr>
@@ -5274,7 +5350,7 @@
           <a:bodyPr wrap="square" lIns="0" tIns="0" rIns="0" bIns="0" rtlCol="0" anchor="ctr"/>
           <a:lstStyle/>
           <a:p>
-            <a:pPr algn="ctr" indent="0" marL="0">
+            <a:pPr marL="0" indent="0" algn="ctr">
               <a:buNone/>
             </a:pPr>
             <a:r>
@@ -5313,7 +5389,7 @@
           <a:bodyPr wrap="square" rtlCol="0" anchor="ctr"/>
           <a:lstStyle/>
           <a:p>
-            <a:pPr indent="0" marL="0">
+            <a:pPr marL="0" indent="0">
               <a:buNone/>
             </a:pPr>
             <a:r>
@@ -5355,6 +5431,13 @@
             <a:prstDash val="solid"/>
           </a:ln>
         </p:spPr>
+        <p:txBody>
+          <a:bodyPr/>
+          <a:lstStyle/>
+          <a:p>
+            <a:endParaRPr lang="en-GB"/>
+          </a:p>
+        </p:txBody>
       </p:sp>
       <p:sp>
         <p:nvSpPr>
@@ -5377,7 +5460,7 @@
           <a:bodyPr wrap="square" lIns="0" tIns="0" rIns="0" bIns="0" rtlCol="0" anchor="ctr"/>
           <a:lstStyle/>
           <a:p>
-            <a:pPr algn="ctr" indent="0" marL="0">
+            <a:pPr marL="0" indent="0" algn="ctr">
               <a:buNone/>
             </a:pPr>
             <a:r>
@@ -5416,7 +5499,7 @@
           <a:bodyPr wrap="square" rtlCol="0" anchor="ctr"/>
           <a:lstStyle/>
           <a:p>
-            <a:pPr indent="0" marL="0">
+            <a:pPr marL="0" indent="0">
               <a:buNone/>
             </a:pPr>
             <a:r>
@@ -5458,6 +5541,13 @@
             <a:prstDash val="solid"/>
           </a:ln>
         </p:spPr>
+        <p:txBody>
+          <a:bodyPr/>
+          <a:lstStyle/>
+          <a:p>
+            <a:endParaRPr lang="en-GB"/>
+          </a:p>
+        </p:txBody>
       </p:sp>
       <p:sp>
         <p:nvSpPr>
@@ -5480,7 +5570,7 @@
           <a:bodyPr wrap="square" lIns="0" tIns="0" rIns="0" bIns="0" rtlCol="0" anchor="ctr"/>
           <a:lstStyle/>
           <a:p>
-            <a:pPr algn="ctr" indent="0" marL="0">
+            <a:pPr marL="0" indent="0" algn="ctr">
               <a:buNone/>
             </a:pPr>
             <a:r>
@@ -5519,7 +5609,7 @@
           <a:bodyPr wrap="square" rtlCol="0" anchor="ctr"/>
           <a:lstStyle/>
           <a:p>
-            <a:pPr indent="0" marL="0">
+            <a:pPr marL="0" indent="0">
               <a:buNone/>
             </a:pPr>
             <a:r>
@@ -5553,6 +5643,7 @@
         <a:solidFill>
           <a:srgbClr val="FAFAF7"/>
         </a:solidFill>
+        <a:effectLst/>
       </p:bgPr>
     </p:bg>
     <p:spTree>
@@ -5593,6 +5684,13 @@
             <a:prstDash val="solid"/>
           </a:ln>
         </p:spPr>
+        <p:txBody>
+          <a:bodyPr/>
+          <a:lstStyle/>
+          <a:p>
+            <a:endParaRPr lang="en-GB"/>
+          </a:p>
+        </p:txBody>
       </p:sp>
       <p:sp>
         <p:nvSpPr>
@@ -5615,7 +5713,7 @@
           <a:bodyPr wrap="square" lIns="0" tIns="0" rIns="0" bIns="0" rtlCol="0" anchor="ctr"/>
           <a:lstStyle/>
           <a:p>
-            <a:pPr indent="0" marL="0">
+            <a:pPr marL="0" indent="0">
               <a:buNone/>
             </a:pPr>
             <a:r>
@@ -5654,7 +5752,7 @@
           <a:bodyPr wrap="square" rtlCol="0" anchor="ctr"/>
           <a:lstStyle/>
           <a:p>
-            <a:pPr algn="r" indent="0" marL="0">
+            <a:pPr marL="0" indent="0" algn="r">
               <a:buNone/>
             </a:pPr>
             <a:r>
@@ -5696,6 +5794,13 @@
             <a:prstDash val="solid"/>
           </a:ln>
         </p:spPr>
+        <p:txBody>
+          <a:bodyPr/>
+          <a:lstStyle/>
+          <a:p>
+            <a:endParaRPr lang="en-GB"/>
+          </a:p>
+        </p:txBody>
       </p:sp>
       <p:sp>
         <p:nvSpPr>
@@ -5718,7 +5823,7 @@
           <a:bodyPr wrap="square" lIns="0" tIns="0" rIns="0" bIns="0" rtlCol="0" anchor="b"/>
           <a:lstStyle/>
           <a:p>
-            <a:pPr algn="ctr" indent="0" marL="0">
+            <a:pPr marL="0" indent="0" algn="ctr">
               <a:buNone/>
             </a:pPr>
             <a:r>
@@ -5757,7 +5862,7 @@
           <a:bodyPr wrap="square" lIns="0" tIns="0" rIns="0" bIns="0" rtlCol="0" anchor="t"/>
           <a:lstStyle/>
           <a:p>
-            <a:pPr algn="ctr" indent="0" marL="0">
+            <a:pPr marL="0" indent="0" algn="ctr">
               <a:buNone/>
             </a:pPr>
             <a:r>
@@ -5799,6 +5904,13 @@
             <a:prstDash val="solid"/>
           </a:ln>
         </p:spPr>
+        <p:txBody>
+          <a:bodyPr/>
+          <a:lstStyle/>
+          <a:p>
+            <a:endParaRPr lang="en-GB"/>
+          </a:p>
+        </p:txBody>
       </p:sp>
       <p:sp>
         <p:nvSpPr>
@@ -5821,7 +5933,7 @@
           <a:bodyPr wrap="square" lIns="0" tIns="0" rIns="0" bIns="0" rtlCol="0" anchor="b"/>
           <a:lstStyle/>
           <a:p>
-            <a:pPr algn="ctr" indent="0" marL="0">
+            <a:pPr marL="0" indent="0" algn="ctr">
               <a:buNone/>
             </a:pPr>
             <a:r>
@@ -5860,7 +5972,7 @@
           <a:bodyPr wrap="square" lIns="0" tIns="0" rIns="0" bIns="0" rtlCol="0" anchor="t"/>
           <a:lstStyle/>
           <a:p>
-            <a:pPr algn="ctr" indent="0" marL="0">
+            <a:pPr marL="0" indent="0" algn="ctr">
               <a:buNone/>
             </a:pPr>
             <a:r>
@@ -5902,6 +6014,13 @@
             <a:prstDash val="solid"/>
           </a:ln>
         </p:spPr>
+        <p:txBody>
+          <a:bodyPr/>
+          <a:lstStyle/>
+          <a:p>
+            <a:endParaRPr lang="en-GB"/>
+          </a:p>
+        </p:txBody>
       </p:sp>
       <p:sp>
         <p:nvSpPr>
@@ -5924,7 +6043,7 @@
           <a:bodyPr wrap="square" lIns="0" tIns="0" rIns="0" bIns="0" rtlCol="0" anchor="b"/>
           <a:lstStyle/>
           <a:p>
-            <a:pPr algn="ctr" indent="0" marL="0">
+            <a:pPr marL="0" indent="0" algn="ctr">
               <a:buNone/>
             </a:pPr>
             <a:r>
@@ -5963,7 +6082,7 @@
           <a:bodyPr wrap="square" lIns="0" tIns="0" rIns="0" bIns="0" rtlCol="0" anchor="t"/>
           <a:lstStyle/>
           <a:p>
-            <a:pPr algn="ctr" indent="0" marL="0">
+            <a:pPr marL="0" indent="0" algn="ctr">
               <a:buNone/>
             </a:pPr>
             <a:r>
@@ -6005,6 +6124,13 @@
             <a:prstDash val="solid"/>
           </a:ln>
         </p:spPr>
+        <p:txBody>
+          <a:bodyPr/>
+          <a:lstStyle/>
+          <a:p>
+            <a:endParaRPr lang="en-GB"/>
+          </a:p>
+        </p:txBody>
       </p:sp>
       <p:sp>
         <p:nvSpPr>
@@ -6027,7 +6153,7 @@
           <a:bodyPr wrap="square" lIns="0" tIns="0" rIns="0" bIns="0" rtlCol="0" anchor="b"/>
           <a:lstStyle/>
           <a:p>
-            <a:pPr algn="ctr" indent="0" marL="0">
+            <a:pPr marL="0" indent="0" algn="ctr">
               <a:buNone/>
             </a:pPr>
             <a:r>
@@ -6066,7 +6192,7 @@
           <a:bodyPr wrap="square" lIns="0" tIns="0" rIns="0" bIns="0" rtlCol="0" anchor="t"/>
           <a:lstStyle/>
           <a:p>
-            <a:pPr algn="ctr" indent="0" marL="0">
+            <a:pPr marL="0" indent="0" algn="ctr">
               <a:buNone/>
             </a:pPr>
             <a:r>
@@ -6086,7 +6212,7 @@
       </p:sp>
       <p:graphicFrame>
         <p:nvGraphicFramePr>
-          <p:cNvPr id="8" name="Table 0"/>
+          <p:cNvPr id="17" name="Table 0"/>
           <p:cNvGraphicFramePr>
             <a:graphicFrameLocks noGrp="1"/>
           </p:cNvGraphicFramePr>
@@ -6107,8 +6233,20 @@
             <a:tbl>
               <a:tblPr/>
               <a:tblGrid>
-                <a:gridCol w="5943600"/>
-                <a:gridCol w="2286000"/>
+                <a:gridCol w="5943600">
+                  <a:extLst>
+                    <a:ext uri="{9D8B030D-6E8A-4147-A177-3AD203B41FA5}">
+                      <a16:colId xmlns:a16="http://schemas.microsoft.com/office/drawing/2014/main" val="20000"/>
+                    </a:ext>
+                  </a:extLst>
+                </a:gridCol>
+                <a:gridCol w="2286000">
+                  <a:extLst>
+                    <a:ext uri="{9D8B030D-6E8A-4147-A177-3AD203B41FA5}">
+                      <a16:colId xmlns:a16="http://schemas.microsoft.com/office/drawing/2014/main" val="20001"/>
+                    </a:ext>
+                  </a:extLst>
+                </a:gridCol>
               </a:tblGrid>
               <a:tr h="0">
                 <a:tc>
@@ -6116,7 +6254,7 @@
                     <a:bodyPr/>
                     <a:lstStyle/>
                     <a:p>
-                      <a:pPr indent="0" marL="0">
+                      <a:pPr marL="0" indent="0">
                         <a:buNone/>
                       </a:pPr>
                       <a:r>
@@ -6137,7 +6275,7 @@
                       </a:endParaRPr>
                     </a:p>
                   </a:txBody>
-                  <a:tcPr marL="91440" marR="91440" marT="45720" marB="45720">
+                  <a:tcPr>
                     <a:lnL w="6350" cap="flat" cmpd="sng" algn="ctr">
                       <a:solidFill>
                         <a:srgbClr val="C9C5BC"/>
@@ -6184,7 +6322,7 @@
                     <a:bodyPr/>
                     <a:lstStyle/>
                     <a:p>
-                      <a:pPr indent="0" marL="0">
+                      <a:pPr marL="0" indent="0">
                         <a:buNone/>
                       </a:pPr>
                       <a:r>
@@ -6205,7 +6343,7 @@
                       </a:endParaRPr>
                     </a:p>
                   </a:txBody>
-                  <a:tcPr marL="91440" marR="91440" marT="45720" marB="45720">
+                  <a:tcPr>
                     <a:lnL w="6350" cap="flat" cmpd="sng" algn="ctr">
                       <a:solidFill>
                         <a:srgbClr val="C9C5BC"/>
@@ -6247,6 +6385,11 @@
                     </a:solidFill>
                   </a:tcPr>
                 </a:tc>
+                <a:extLst>
+                  <a:ext uri="{0D108BD9-81ED-4DB2-BD59-A6C34878D82A}">
+                    <a16:rowId xmlns:a16="http://schemas.microsoft.com/office/drawing/2014/main" val="10000"/>
+                  </a:ext>
+                </a:extLst>
               </a:tr>
               <a:tr h="0">
                 <a:tc>
@@ -6254,7 +6397,7 @@
                     <a:bodyPr/>
                     <a:lstStyle/>
                     <a:p>
-                      <a:pPr indent="0" marL="0">
+                      <a:pPr marL="0" indent="0">
                         <a:buNone/>
                       </a:pPr>
                       <a:r>
@@ -6275,7 +6418,7 @@
                       </a:endParaRPr>
                     </a:p>
                   </a:txBody>
-                  <a:tcPr marL="91440" marR="91440" marT="45720" marB="45720">
+                  <a:tcPr>
                     <a:lnL w="6350" cap="flat" cmpd="sng" algn="ctr">
                       <a:solidFill>
                         <a:srgbClr val="C9C5BC"/>
@@ -6322,7 +6465,7 @@
                     <a:bodyPr/>
                     <a:lstStyle/>
                     <a:p>
-                      <a:pPr indent="0" marL="0">
+                      <a:pPr marL="0" indent="0">
                         <a:buNone/>
                       </a:pPr>
                       <a:r>
@@ -6343,7 +6486,7 @@
                       </a:endParaRPr>
                     </a:p>
                   </a:txBody>
-                  <a:tcPr marL="91440" marR="91440" marT="45720" marB="45720">
+                  <a:tcPr>
                     <a:lnL w="6350" cap="flat" cmpd="sng" algn="ctr">
                       <a:solidFill>
                         <a:srgbClr val="C9C5BC"/>
@@ -6385,6 +6528,11 @@
                     </a:solidFill>
                   </a:tcPr>
                 </a:tc>
+                <a:extLst>
+                  <a:ext uri="{0D108BD9-81ED-4DB2-BD59-A6C34878D82A}">
+                    <a16:rowId xmlns:a16="http://schemas.microsoft.com/office/drawing/2014/main" val="10001"/>
+                  </a:ext>
+                </a:extLst>
               </a:tr>
               <a:tr h="0">
                 <a:tc>
@@ -6392,7 +6540,7 @@
                     <a:bodyPr/>
                     <a:lstStyle/>
                     <a:p>
-                      <a:pPr indent="0" marL="0">
+                      <a:pPr marL="0" indent="0">
                         <a:buNone/>
                       </a:pPr>
                       <a:r>
@@ -6413,7 +6561,7 @@
                       </a:endParaRPr>
                     </a:p>
                   </a:txBody>
-                  <a:tcPr marL="91440" marR="91440" marT="45720" marB="45720">
+                  <a:tcPr>
                     <a:lnL w="6350" cap="flat" cmpd="sng" algn="ctr">
                       <a:solidFill>
                         <a:srgbClr val="C9C5BC"/>
@@ -6460,7 +6608,7 @@
                     <a:bodyPr/>
                     <a:lstStyle/>
                     <a:p>
-                      <a:pPr indent="0" marL="0">
+                      <a:pPr marL="0" indent="0">
                         <a:buNone/>
                       </a:pPr>
                       <a:r>
@@ -6481,7 +6629,7 @@
                       </a:endParaRPr>
                     </a:p>
                   </a:txBody>
-                  <a:tcPr marL="91440" marR="91440" marT="45720" marB="45720">
+                  <a:tcPr>
                     <a:lnL w="6350" cap="flat" cmpd="sng" algn="ctr">
                       <a:solidFill>
                         <a:srgbClr val="C9C5BC"/>
@@ -6523,6 +6671,11 @@
                     </a:solidFill>
                   </a:tcPr>
                 </a:tc>
+                <a:extLst>
+                  <a:ext uri="{0D108BD9-81ED-4DB2-BD59-A6C34878D82A}">
+                    <a16:rowId xmlns:a16="http://schemas.microsoft.com/office/drawing/2014/main" val="10002"/>
+                  </a:ext>
+                </a:extLst>
               </a:tr>
               <a:tr h="0">
                 <a:tc>
@@ -6530,7 +6683,7 @@
                     <a:bodyPr/>
                     <a:lstStyle/>
                     <a:p>
-                      <a:pPr indent="0" marL="0">
+                      <a:pPr marL="0" indent="0">
                         <a:buNone/>
                       </a:pPr>
                       <a:r>
@@ -6551,7 +6704,7 @@
                       </a:endParaRPr>
                     </a:p>
                   </a:txBody>
-                  <a:tcPr marL="91440" marR="91440" marT="45720" marB="45720">
+                  <a:tcPr>
                     <a:lnL w="6350" cap="flat" cmpd="sng" algn="ctr">
                       <a:solidFill>
                         <a:srgbClr val="C9C5BC"/>
@@ -6598,7 +6751,7 @@
                     <a:bodyPr/>
                     <a:lstStyle/>
                     <a:p>
-                      <a:pPr indent="0" marL="0">
+                      <a:pPr marL="0" indent="0">
                         <a:buNone/>
                       </a:pPr>
                       <a:r>
@@ -6619,7 +6772,7 @@
                       </a:endParaRPr>
                     </a:p>
                   </a:txBody>
-                  <a:tcPr marL="91440" marR="91440" marT="45720" marB="45720">
+                  <a:tcPr>
                     <a:lnL w="6350" cap="flat" cmpd="sng" algn="ctr">
                       <a:solidFill>
                         <a:srgbClr val="C9C5BC"/>
@@ -6661,6 +6814,11 @@
                     </a:solidFill>
                   </a:tcPr>
                 </a:tc>
+                <a:extLst>
+                  <a:ext uri="{0D108BD9-81ED-4DB2-BD59-A6C34878D82A}">
+                    <a16:rowId xmlns:a16="http://schemas.microsoft.com/office/drawing/2014/main" val="10003"/>
+                  </a:ext>
+                </a:extLst>
               </a:tr>
               <a:tr h="0">
                 <a:tc>
@@ -6668,7 +6826,7 @@
                     <a:bodyPr/>
                     <a:lstStyle/>
                     <a:p>
-                      <a:pPr indent="0" marL="0">
+                      <a:pPr marL="0" indent="0">
                         <a:buNone/>
                       </a:pPr>
                       <a:r>
@@ -6689,7 +6847,7 @@
                       </a:endParaRPr>
                     </a:p>
                   </a:txBody>
-                  <a:tcPr marL="91440" marR="91440" marT="45720" marB="45720">
+                  <a:tcPr>
                     <a:lnL w="6350" cap="flat" cmpd="sng" algn="ctr">
                       <a:solidFill>
                         <a:srgbClr val="C9C5BC"/>
@@ -6736,7 +6894,7 @@
                     <a:bodyPr/>
                     <a:lstStyle/>
                     <a:p>
-                      <a:pPr indent="0" marL="0">
+                      <a:pPr marL="0" indent="0">
                         <a:buNone/>
                       </a:pPr>
                       <a:r>
@@ -6757,7 +6915,7 @@
                       </a:endParaRPr>
                     </a:p>
                   </a:txBody>
-                  <a:tcPr marL="91440" marR="91440" marT="45720" marB="45720">
+                  <a:tcPr>
                     <a:lnL w="6350" cap="flat" cmpd="sng" algn="ctr">
                       <a:solidFill>
                         <a:srgbClr val="C9C5BC"/>
@@ -6799,6 +6957,11 @@
                     </a:solidFill>
                   </a:tcPr>
                 </a:tc>
+                <a:extLst>
+                  <a:ext uri="{0D108BD9-81ED-4DB2-BD59-A6C34878D82A}">
+                    <a16:rowId xmlns:a16="http://schemas.microsoft.com/office/drawing/2014/main" val="10004"/>
+                  </a:ext>
+                </a:extLst>
               </a:tr>
               <a:tr h="0">
                 <a:tc>
@@ -6806,7 +6969,7 @@
                     <a:bodyPr/>
                     <a:lstStyle/>
                     <a:p>
-                      <a:pPr indent="0" marL="0">
+                      <a:pPr marL="0" indent="0">
                         <a:buNone/>
                       </a:pPr>
                       <a:r>
@@ -6827,7 +6990,7 @@
                       </a:endParaRPr>
                     </a:p>
                   </a:txBody>
-                  <a:tcPr marL="91440" marR="91440" marT="45720" marB="45720">
+                  <a:tcPr>
                     <a:lnL w="6350" cap="flat" cmpd="sng" algn="ctr">
                       <a:solidFill>
                         <a:srgbClr val="C9C5BC"/>
@@ -6874,7 +7037,7 @@
                     <a:bodyPr/>
                     <a:lstStyle/>
                     <a:p>
-                      <a:pPr indent="0" marL="0">
+                      <a:pPr marL="0" indent="0">
                         <a:buNone/>
                       </a:pPr>
                       <a:r>
@@ -6895,7 +7058,7 @@
                       </a:endParaRPr>
                     </a:p>
                   </a:txBody>
-                  <a:tcPr marL="91440" marR="91440" marT="45720" marB="45720">
+                  <a:tcPr>
                     <a:lnL w="6350" cap="flat" cmpd="sng" algn="ctr">
                       <a:solidFill>
                         <a:srgbClr val="C9C5BC"/>
@@ -6937,6 +7100,11 @@
                     </a:solidFill>
                   </a:tcPr>
                 </a:tc>
+                <a:extLst>
+                  <a:ext uri="{0D108BD9-81ED-4DB2-BD59-A6C34878D82A}">
+                    <a16:rowId xmlns:a16="http://schemas.microsoft.com/office/drawing/2014/main" val="10005"/>
+                  </a:ext>
+                </a:extLst>
               </a:tr>
               <a:tr h="0">
                 <a:tc>
@@ -6944,7 +7112,7 @@
                     <a:bodyPr/>
                     <a:lstStyle/>
                     <a:p>
-                      <a:pPr indent="0" marL="0">
+                      <a:pPr marL="0" indent="0">
                         <a:buNone/>
                       </a:pPr>
                       <a:r>
@@ -6965,7 +7133,7 @@
                       </a:endParaRPr>
                     </a:p>
                   </a:txBody>
-                  <a:tcPr marL="91440" marR="91440" marT="45720" marB="45720">
+                  <a:tcPr>
                     <a:lnL w="6350" cap="flat" cmpd="sng" algn="ctr">
                       <a:solidFill>
                         <a:srgbClr val="C9C5BC"/>
@@ -7012,7 +7180,7 @@
                     <a:bodyPr/>
                     <a:lstStyle/>
                     <a:p>
-                      <a:pPr indent="0" marL="0">
+                      <a:pPr marL="0" indent="0">
                         <a:buNone/>
                       </a:pPr>
                       <a:r>
@@ -7033,7 +7201,7 @@
                       </a:endParaRPr>
                     </a:p>
                   </a:txBody>
-                  <a:tcPr marL="91440" marR="91440" marT="45720" marB="45720">
+                  <a:tcPr>
                     <a:lnL w="6350" cap="flat" cmpd="sng" algn="ctr">
                       <a:solidFill>
                         <a:srgbClr val="C9C5BC"/>
@@ -7075,6 +7243,11 @@
                     </a:solidFill>
                   </a:tcPr>
                 </a:tc>
+                <a:extLst>
+                  <a:ext uri="{0D108BD9-81ED-4DB2-BD59-A6C34878D82A}">
+                    <a16:rowId xmlns:a16="http://schemas.microsoft.com/office/drawing/2014/main" val="10006"/>
+                  </a:ext>
+                </a:extLst>
               </a:tr>
             </a:tbl>
           </a:graphicData>
@@ -7096,6 +7269,7 @@
         <a:solidFill>
           <a:srgbClr val="FAFAF7"/>
         </a:solidFill>
+        <a:effectLst/>
       </p:bgPr>
     </p:bg>
     <p:spTree>
@@ -7136,6 +7310,13 @@
             <a:prstDash val="solid"/>
           </a:ln>
         </p:spPr>
+        <p:txBody>
+          <a:bodyPr/>
+          <a:lstStyle/>
+          <a:p>
+            <a:endParaRPr lang="en-GB"/>
+          </a:p>
+        </p:txBody>
       </p:sp>
       <p:sp>
         <p:nvSpPr>
@@ -7158,7 +7339,7 @@
           <a:bodyPr wrap="square" lIns="0" tIns="0" rIns="0" bIns="0" rtlCol="0" anchor="ctr"/>
           <a:lstStyle/>
           <a:p>
-            <a:pPr indent="0" marL="0">
+            <a:pPr marL="0" indent="0">
               <a:buNone/>
             </a:pPr>
             <a:r>
@@ -7197,7 +7378,7 @@
           <a:bodyPr wrap="square" rtlCol="0" anchor="ctr"/>
           <a:lstStyle/>
           <a:p>
-            <a:pPr algn="r" indent="0" marL="0">
+            <a:pPr marL="0" indent="0" algn="r">
               <a:buNone/>
             </a:pPr>
             <a:r>
@@ -7239,6 +7420,13 @@
             <a:prstDash val="solid"/>
           </a:ln>
         </p:spPr>
+        <p:txBody>
+          <a:bodyPr/>
+          <a:lstStyle/>
+          <a:p>
+            <a:endParaRPr lang="en-GB"/>
+          </a:p>
+        </p:txBody>
       </p:sp>
       <p:sp>
         <p:nvSpPr>
@@ -7264,6 +7452,13 @@
             <a:prstDash val="solid"/>
           </a:ln>
         </p:spPr>
+        <p:txBody>
+          <a:bodyPr/>
+          <a:lstStyle/>
+          <a:p>
+            <a:endParaRPr lang="en-GB"/>
+          </a:p>
+        </p:txBody>
       </p:sp>
       <p:sp>
         <p:nvSpPr>
@@ -7286,7 +7481,7 @@
           <a:bodyPr wrap="square" lIns="0" tIns="0" rIns="0" bIns="0" rtlCol="0" anchor="ctr"/>
           <a:lstStyle/>
           <a:p>
-            <a:pPr algn="ctr" indent="0" marL="0">
+            <a:pPr marL="0" indent="0" algn="ctr">
               <a:buNone/>
             </a:pPr>
             <a:r>
@@ -7325,7 +7520,7 @@
           <a:bodyPr wrap="square" rtlCol="0" anchor="ctr"/>
           <a:lstStyle/>
           <a:p>
-            <a:pPr indent="0" marL="0">
+            <a:pPr marL="0" indent="0">
               <a:buNone/>
             </a:pPr>
             <a:r>
@@ -7367,6 +7562,13 @@
             <a:prstDash val="solid"/>
           </a:ln>
         </p:spPr>
+        <p:txBody>
+          <a:bodyPr/>
+          <a:lstStyle/>
+          <a:p>
+            <a:endParaRPr lang="en-GB"/>
+          </a:p>
+        </p:txBody>
       </p:sp>
       <p:sp>
         <p:nvSpPr>
@@ -7392,6 +7594,13 @@
             <a:prstDash val="solid"/>
           </a:ln>
         </p:spPr>
+        <p:txBody>
+          <a:bodyPr/>
+          <a:lstStyle/>
+          <a:p>
+            <a:endParaRPr lang="en-GB"/>
+          </a:p>
+        </p:txBody>
       </p:sp>
       <p:sp>
         <p:nvSpPr>
@@ -7414,7 +7623,7 @@
           <a:bodyPr wrap="square" lIns="0" tIns="0" rIns="0" bIns="0" rtlCol="0" anchor="ctr"/>
           <a:lstStyle/>
           <a:p>
-            <a:pPr algn="ctr" indent="0" marL="0">
+            <a:pPr marL="0" indent="0" algn="ctr">
               <a:buNone/>
             </a:pPr>
             <a:r>
@@ -7453,7 +7662,7 @@
           <a:bodyPr wrap="square" rtlCol="0" anchor="ctr"/>
           <a:lstStyle/>
           <a:p>
-            <a:pPr indent="0" marL="0">
+            <a:pPr marL="0" indent="0">
               <a:buNone/>
             </a:pPr>
             <a:r>
@@ -7495,6 +7704,13 @@
             <a:prstDash val="solid"/>
           </a:ln>
         </p:spPr>
+        <p:txBody>
+          <a:bodyPr/>
+          <a:lstStyle/>
+          <a:p>
+            <a:endParaRPr lang="en-GB"/>
+          </a:p>
+        </p:txBody>
       </p:sp>
       <p:sp>
         <p:nvSpPr>
@@ -7520,6 +7736,13 @@
             <a:prstDash val="solid"/>
           </a:ln>
         </p:spPr>
+        <p:txBody>
+          <a:bodyPr/>
+          <a:lstStyle/>
+          <a:p>
+            <a:endParaRPr lang="en-GB"/>
+          </a:p>
+        </p:txBody>
       </p:sp>
       <p:sp>
         <p:nvSpPr>
@@ -7542,7 +7765,7 @@
           <a:bodyPr wrap="square" lIns="0" tIns="0" rIns="0" bIns="0" rtlCol="0" anchor="ctr"/>
           <a:lstStyle/>
           <a:p>
-            <a:pPr algn="ctr" indent="0" marL="0">
+            <a:pPr marL="0" indent="0" algn="ctr">
               <a:buNone/>
             </a:pPr>
             <a:r>
@@ -7581,7 +7804,7 @@
           <a:bodyPr wrap="square" rtlCol="0" anchor="ctr"/>
           <a:lstStyle/>
           <a:p>
-            <a:pPr indent="0" marL="0">
+            <a:pPr marL="0" indent="0">
               <a:buNone/>
             </a:pPr>
             <a:r>
@@ -7623,6 +7846,13 @@
             <a:prstDash val="solid"/>
           </a:ln>
         </p:spPr>
+        <p:txBody>
+          <a:bodyPr/>
+          <a:lstStyle/>
+          <a:p>
+            <a:endParaRPr lang="en-GB"/>
+          </a:p>
+        </p:txBody>
       </p:sp>
       <p:sp>
         <p:nvSpPr>
@@ -7648,6 +7878,13 @@
             <a:prstDash val="solid"/>
           </a:ln>
         </p:spPr>
+        <p:txBody>
+          <a:bodyPr/>
+          <a:lstStyle/>
+          <a:p>
+            <a:endParaRPr lang="en-GB"/>
+          </a:p>
+        </p:txBody>
       </p:sp>
       <p:sp>
         <p:nvSpPr>
@@ -7670,7 +7907,7 @@
           <a:bodyPr wrap="square" lIns="0" tIns="0" rIns="0" bIns="0" rtlCol="0" anchor="ctr"/>
           <a:lstStyle/>
           <a:p>
-            <a:pPr algn="ctr" indent="0" marL="0">
+            <a:pPr marL="0" indent="0" algn="ctr">
               <a:buNone/>
             </a:pPr>
             <a:r>
@@ -7709,7 +7946,7 @@
           <a:bodyPr wrap="square" rtlCol="0" anchor="ctr"/>
           <a:lstStyle/>
           <a:p>
-            <a:pPr indent="0" marL="0">
+            <a:pPr marL="0" indent="0">
               <a:buNone/>
             </a:pPr>
             <a:r>
@@ -7743,6 +7980,7 @@
         <a:solidFill>
           <a:srgbClr val="FAFAF7"/>
         </a:solidFill>
+        <a:effectLst/>
       </p:bgPr>
     </p:bg>
     <p:spTree>
@@ -7783,6 +8021,13 @@
             <a:prstDash val="solid"/>
           </a:ln>
         </p:spPr>
+        <p:txBody>
+          <a:bodyPr/>
+          <a:lstStyle/>
+          <a:p>
+            <a:endParaRPr lang="en-GB"/>
+          </a:p>
+        </p:txBody>
       </p:sp>
       <p:sp>
         <p:nvSpPr>
@@ -7805,7 +8050,7 @@
           <a:bodyPr wrap="square" lIns="0" tIns="0" rIns="0" bIns="0" rtlCol="0" anchor="ctr"/>
           <a:lstStyle/>
           <a:p>
-            <a:pPr indent="0" marL="0">
+            <a:pPr marL="0" indent="0">
               <a:buNone/>
             </a:pPr>
             <a:r>
@@ -7844,7 +8089,7 @@
           <a:bodyPr wrap="square" rtlCol="0" anchor="ctr"/>
           <a:lstStyle/>
           <a:p>
-            <a:pPr algn="r" indent="0" marL="0">
+            <a:pPr marL="0" indent="0" algn="r">
               <a:buNone/>
             </a:pPr>
             <a:r>
@@ -7886,6 +8131,13 @@
             <a:prstDash val="solid"/>
           </a:ln>
         </p:spPr>
+        <p:txBody>
+          <a:bodyPr/>
+          <a:lstStyle/>
+          <a:p>
+            <a:endParaRPr lang="en-GB"/>
+          </a:p>
+        </p:txBody>
       </p:sp>
       <p:sp>
         <p:nvSpPr>
@@ -7908,7 +8160,7 @@
           <a:bodyPr wrap="square" lIns="0" tIns="0" rIns="0" bIns="0" rtlCol="0" anchor="ctr"/>
           <a:lstStyle/>
           <a:p>
-            <a:pPr algn="ctr" indent="0" marL="0">
+            <a:pPr marL="0" indent="0" algn="ctr">
               <a:buNone/>
             </a:pPr>
             <a:r>
@@ -7948,6 +8200,13 @@
             <a:prstDash val="solid"/>
           </a:ln>
         </p:spPr>
+        <p:txBody>
+          <a:bodyPr/>
+          <a:lstStyle/>
+          <a:p>
+            <a:endParaRPr lang="en-GB"/>
+          </a:p>
+        </p:txBody>
       </p:sp>
       <p:sp>
         <p:nvSpPr>
@@ -7970,7 +8229,7 @@
           <a:bodyPr wrap="square" rtlCol="0" anchor="t"/>
           <a:lstStyle/>
           <a:p>
-            <a:pPr indent="0" marL="0">
+            <a:pPr marL="0" indent="0">
               <a:buNone/>
             </a:pPr>
             <a:r>
@@ -7984,9 +8243,6 @@
               </a:rPr>
               <a:t>Ce qui fonctionne : </a:t>
             </a:r>
-            <a:pPr indent="0" marL="0">
-              <a:buNone/>
-            </a:pPr>
             <a:r>
               <a:rPr lang="en-US" sz="1300" dirty="0">
                 <a:solidFill>
@@ -8023,7 +8279,7 @@
           <a:bodyPr wrap="square" rtlCol="0" anchor="t"/>
           <a:lstStyle/>
           <a:p>
-            <a:pPr indent="0" marL="0">
+            <a:pPr marL="0" indent="0">
               <a:buNone/>
             </a:pPr>
             <a:r>
@@ -8037,9 +8293,6 @@
               </a:rPr>
               <a:t>Conjecture non réfutée : </a:t>
             </a:r>
-            <a:pPr indent="0" marL="0">
-              <a:buNone/>
-            </a:pPr>
             <a:r>
               <a:rPr lang="en-US" sz="1300" dirty="0">
                 <a:solidFill>
@@ -8076,7 +8329,7 @@
           <a:bodyPr wrap="square" rtlCol="0" anchor="t"/>
           <a:lstStyle/>
           <a:p>
-            <a:pPr indent="0" marL="0">
+            <a:pPr marL="0" indent="0">
               <a:buNone/>
             </a:pPr>
             <a:r>
@@ -8090,9 +8343,6 @@
               </a:rPr>
               <a:t>FunSearch : </a:t>
             </a:r>
-            <a:pPr indent="0" marL="0">
-              <a:buNone/>
-            </a:pPr>
             <a:r>
               <a:rPr lang="en-US" sz="1300" dirty="0">
                 <a:solidFill>
@@ -8129,7 +8379,7 @@
           <a:bodyPr wrap="square" rtlCol="0" anchor="t"/>
           <a:lstStyle/>
           <a:p>
-            <a:pPr indent="0" marL="0">
+            <a:pPr marL="0" indent="0">
               <a:buNone/>
             </a:pPr>
             <a:r>
@@ -8143,9 +8393,6 @@
               </a:rPr>
               <a:t>Perspective : </a:t>
             </a:r>
-            <a:pPr indent="0" marL="0">
-              <a:buNone/>
-            </a:pPr>
             <a:r>
               <a:rPr lang="en-US" sz="1300" dirty="0">
                 <a:solidFill>
@@ -8462,4 +8709,319 @@
     </a:ext>
   </a:extLst>
 </a:theme>
+</file>
+
+<file path=ppt/theme/theme2.xml><?xml version="1.0" encoding="utf-8"?>
+<a:theme xmlns:a="http://schemas.openxmlformats.org/drawingml/2006/main" name="Thème Office">
+  <a:themeElements>
+    <a:clrScheme name="Office">
+      <a:dk1>
+        <a:sysClr val="windowText" lastClr="000000"/>
+      </a:dk1>
+      <a:lt1>
+        <a:sysClr val="window" lastClr="FFFFFF"/>
+      </a:lt1>
+      <a:dk2>
+        <a:srgbClr val="0E2841"/>
+      </a:dk2>
+      <a:lt2>
+        <a:srgbClr val="E8E8E8"/>
+      </a:lt2>
+      <a:accent1>
+        <a:srgbClr val="156082"/>
+      </a:accent1>
+      <a:accent2>
+        <a:srgbClr val="E97132"/>
+      </a:accent2>
+      <a:accent3>
+        <a:srgbClr val="196B24"/>
+      </a:accent3>
+      <a:accent4>
+        <a:srgbClr val="0F9ED5"/>
+      </a:accent4>
+      <a:accent5>
+        <a:srgbClr val="A02B93"/>
+      </a:accent5>
+      <a:accent6>
+        <a:srgbClr val="4EA72E"/>
+      </a:accent6>
+      <a:hlink>
+        <a:srgbClr val="467886"/>
+      </a:hlink>
+      <a:folHlink>
+        <a:srgbClr val="96607D"/>
+      </a:folHlink>
+    </a:clrScheme>
+    <a:fontScheme name="Office">
+      <a:majorFont>
+        <a:latin typeface="Aptos Display" panose="02110004020202020204"/>
+        <a:ea typeface=""/>
+        <a:cs typeface=""/>
+        <a:font script="Jpan" typeface="游ゴシック Light"/>
+        <a:font script="Hang" typeface="맑은 고딕"/>
+        <a:font script="Hans" typeface="等线 Light"/>
+        <a:font script="Hant" typeface="新細明體"/>
+        <a:font script="Arab" typeface="Times New Roman"/>
+        <a:font script="Hebr" typeface="Times New Roman"/>
+        <a:font script="Thai" typeface="Angsana New"/>
+        <a:font script="Ethi" typeface="Nyala"/>
+        <a:font script="Beng" typeface="Vrinda"/>
+        <a:font script="Gujr" typeface="Shruti"/>
+        <a:font script="Khmr" typeface="MoolBoran"/>
+        <a:font script="Knda" typeface="Tunga"/>
+        <a:font script="Guru" typeface="Raavi"/>
+        <a:font script="Cans" typeface="Euphemia"/>
+        <a:font script="Cher" typeface="Plantagenet Cherokee"/>
+        <a:font script="Yiii" typeface="Microsoft Yi Baiti"/>
+        <a:font script="Tibt" typeface="Microsoft Himalaya"/>
+        <a:font script="Thaa" typeface="MV Boli"/>
+        <a:font script="Deva" typeface="Mangal"/>
+        <a:font script="Telu" typeface="Gautami"/>
+        <a:font script="Taml" typeface="Latha"/>
+        <a:font script="Syrc" typeface="Estrangelo Edessa"/>
+        <a:font script="Orya" typeface="Kalinga"/>
+        <a:font script="Mlym" typeface="Kartika"/>
+        <a:font script="Laoo" typeface="DokChampa"/>
+        <a:font script="Sinh" typeface="Iskoola Pota"/>
+        <a:font script="Mong" typeface="Mongolian Baiti"/>
+        <a:font script="Viet" typeface="Times New Roman"/>
+        <a:font script="Uigh" typeface="Microsoft Uighur"/>
+        <a:font script="Geor" typeface="Sylfaen"/>
+        <a:font script="Armn" typeface="Arial"/>
+        <a:font script="Bugi" typeface="Leelawadee UI"/>
+        <a:font script="Bopo" typeface="Microsoft JhengHei"/>
+        <a:font script="Java" typeface="Javanese Text"/>
+        <a:font script="Lisu" typeface="Segoe UI"/>
+        <a:font script="Mymr" typeface="Myanmar Text"/>
+        <a:font script="Nkoo" typeface="Ebrima"/>
+        <a:font script="Olck" typeface="Nirmala UI"/>
+        <a:font script="Osma" typeface="Ebrima"/>
+        <a:font script="Phag" typeface="Phagspa"/>
+        <a:font script="Syrn" typeface="Estrangelo Edessa"/>
+        <a:font script="Syrj" typeface="Estrangelo Edessa"/>
+        <a:font script="Syre" typeface="Estrangelo Edessa"/>
+        <a:font script="Sora" typeface="Nirmala UI"/>
+        <a:font script="Tale" typeface="Microsoft Tai Le"/>
+        <a:font script="Talu" typeface="Microsoft New Tai Lue"/>
+        <a:font script="Tfng" typeface="Ebrima"/>
+      </a:majorFont>
+      <a:minorFont>
+        <a:latin typeface="Aptos" panose="02110004020202020204"/>
+        <a:ea typeface=""/>
+        <a:cs typeface=""/>
+        <a:font script="Jpan" typeface="游ゴシック"/>
+        <a:font script="Hang" typeface="맑은 고딕"/>
+        <a:font script="Hans" typeface="等线"/>
+        <a:font script="Hant" typeface="新細明體"/>
+        <a:font script="Arab" typeface="Arial"/>
+        <a:font script="Hebr" typeface="Arial"/>
+        <a:font script="Thai" typeface="Cordia New"/>
+        <a:font script="Ethi" typeface="Nyala"/>
+        <a:font script="Beng" typeface="Vrinda"/>
+        <a:font script="Gujr" typeface="Shruti"/>
+        <a:font script="Khmr" typeface="DaunPenh"/>
+        <a:font script="Knda" typeface="Tunga"/>
+        <a:font script="Guru" typeface="Raavi"/>
+        <a:font script="Cans" typeface="Euphemia"/>
+        <a:font script="Cher" typeface="Plantagenet Cherokee"/>
+        <a:font script="Yiii" typeface="Microsoft Yi Baiti"/>
+        <a:font script="Tibt" typeface="Microsoft Himalaya"/>
+        <a:font script="Thaa" typeface="MV Boli"/>
+        <a:font script="Deva" typeface="Mangal"/>
+        <a:font script="Telu" typeface="Gautami"/>
+        <a:font script="Taml" typeface="Latha"/>
+        <a:font script="Syrc" typeface="Estrangelo Edessa"/>
+        <a:font script="Orya" typeface="Kalinga"/>
+        <a:font script="Mlym" typeface="Kartika"/>
+        <a:font script="Laoo" typeface="DokChampa"/>
+        <a:font script="Sinh" typeface="Iskoola Pota"/>
+        <a:font script="Mong" typeface="Mongolian Baiti"/>
+        <a:font script="Viet" typeface="Arial"/>
+        <a:font script="Uigh" typeface="Microsoft Uighur"/>
+        <a:font script="Geor" typeface="Sylfaen"/>
+        <a:font script="Armn" typeface="Arial"/>
+        <a:font script="Bugi" typeface="Leelawadee UI"/>
+        <a:font script="Bopo" typeface="Microsoft JhengHei"/>
+        <a:font script="Java" typeface="Javanese Text"/>
+        <a:font script="Lisu" typeface="Segoe UI"/>
+        <a:font script="Mymr" typeface="Myanmar Text"/>
+        <a:font script="Nkoo" typeface="Ebrima"/>
+        <a:font script="Olck" typeface="Nirmala UI"/>
+        <a:font script="Osma" typeface="Ebrima"/>
+        <a:font script="Phag" typeface="Phagspa"/>
+        <a:font script="Syrn" typeface="Estrangelo Edessa"/>
+        <a:font script="Syrj" typeface="Estrangelo Edessa"/>
+        <a:font script="Syre" typeface="Estrangelo Edessa"/>
+        <a:font script="Sora" typeface="Nirmala UI"/>
+        <a:font script="Tale" typeface="Microsoft Tai Le"/>
+        <a:font script="Talu" typeface="Microsoft New Tai Lue"/>
+        <a:font script="Tfng" typeface="Ebrima"/>
+      </a:minorFont>
+    </a:fontScheme>
+    <a:fmtScheme name="Office">
+      <a:fillStyleLst>
+        <a:solidFill>
+          <a:schemeClr val="phClr"/>
+        </a:solidFill>
+        <a:gradFill rotWithShape="1">
+          <a:gsLst>
+            <a:gs pos="0">
+              <a:schemeClr val="phClr">
+                <a:lumMod val="110000"/>
+                <a:satMod val="105000"/>
+                <a:tint val="67000"/>
+              </a:schemeClr>
+            </a:gs>
+            <a:gs pos="50000">
+              <a:schemeClr val="phClr">
+                <a:lumMod val="105000"/>
+                <a:satMod val="103000"/>
+                <a:tint val="73000"/>
+              </a:schemeClr>
+            </a:gs>
+            <a:gs pos="100000">
+              <a:schemeClr val="phClr">
+                <a:lumMod val="105000"/>
+                <a:satMod val="109000"/>
+                <a:tint val="81000"/>
+              </a:schemeClr>
+            </a:gs>
+          </a:gsLst>
+          <a:lin ang="5400000" scaled="0"/>
+        </a:gradFill>
+        <a:gradFill rotWithShape="1">
+          <a:gsLst>
+            <a:gs pos="0">
+              <a:schemeClr val="phClr">
+                <a:satMod val="103000"/>
+                <a:lumMod val="102000"/>
+                <a:tint val="94000"/>
+              </a:schemeClr>
+            </a:gs>
+            <a:gs pos="50000">
+              <a:schemeClr val="phClr">
+                <a:satMod val="110000"/>
+                <a:lumMod val="100000"/>
+                <a:shade val="100000"/>
+              </a:schemeClr>
+            </a:gs>
+            <a:gs pos="100000">
+              <a:schemeClr val="phClr">
+                <a:lumMod val="99000"/>
+                <a:satMod val="120000"/>
+                <a:shade val="78000"/>
+              </a:schemeClr>
+            </a:gs>
+          </a:gsLst>
+          <a:lin ang="5400000" scaled="0"/>
+        </a:gradFill>
+      </a:fillStyleLst>
+      <a:lnStyleLst>
+        <a:ln w="12700" cap="flat" cmpd="sng" algn="ctr">
+          <a:solidFill>
+            <a:schemeClr val="phClr"/>
+          </a:solidFill>
+          <a:prstDash val="solid"/>
+          <a:miter lim="800000"/>
+        </a:ln>
+        <a:ln w="19050" cap="flat" cmpd="sng" algn="ctr">
+          <a:solidFill>
+            <a:schemeClr val="phClr"/>
+          </a:solidFill>
+          <a:prstDash val="solid"/>
+          <a:miter lim="800000"/>
+        </a:ln>
+        <a:ln w="25400" cap="flat" cmpd="sng" algn="ctr">
+          <a:solidFill>
+            <a:schemeClr val="phClr"/>
+          </a:solidFill>
+          <a:prstDash val="solid"/>
+          <a:miter lim="800000"/>
+        </a:ln>
+      </a:lnStyleLst>
+      <a:effectStyleLst>
+        <a:effectStyle>
+          <a:effectLst/>
+        </a:effectStyle>
+        <a:effectStyle>
+          <a:effectLst/>
+        </a:effectStyle>
+        <a:effectStyle>
+          <a:effectLst>
+            <a:outerShdw blurRad="57150" dist="19050" dir="5400000" algn="ctr" rotWithShape="0">
+              <a:srgbClr val="000000">
+                <a:alpha val="63000"/>
+              </a:srgbClr>
+            </a:outerShdw>
+          </a:effectLst>
+        </a:effectStyle>
+      </a:effectStyleLst>
+      <a:bgFillStyleLst>
+        <a:solidFill>
+          <a:schemeClr val="phClr"/>
+        </a:solidFill>
+        <a:solidFill>
+          <a:schemeClr val="phClr">
+            <a:tint val="95000"/>
+            <a:satMod val="170000"/>
+          </a:schemeClr>
+        </a:solidFill>
+        <a:gradFill rotWithShape="1">
+          <a:gsLst>
+            <a:gs pos="0">
+              <a:schemeClr val="phClr">
+                <a:tint val="93000"/>
+                <a:satMod val="150000"/>
+                <a:shade val="98000"/>
+                <a:lumMod val="102000"/>
+              </a:schemeClr>
+            </a:gs>
+            <a:gs pos="50000">
+              <a:schemeClr val="phClr">
+                <a:tint val="98000"/>
+                <a:satMod val="130000"/>
+                <a:shade val="90000"/>
+                <a:lumMod val="103000"/>
+              </a:schemeClr>
+            </a:gs>
+            <a:gs pos="100000">
+              <a:schemeClr val="phClr">
+                <a:shade val="63000"/>
+                <a:satMod val="120000"/>
+              </a:schemeClr>
+            </a:gs>
+          </a:gsLst>
+          <a:lin ang="5400000" scaled="0"/>
+        </a:gradFill>
+      </a:bgFillStyleLst>
+    </a:fmtScheme>
+  </a:themeElements>
+  <a:objectDefaults>
+    <a:lnDef>
+      <a:spPr/>
+      <a:bodyPr/>
+      <a:lstStyle/>
+      <a:style>
+        <a:lnRef idx="2">
+          <a:schemeClr val="accent1"/>
+        </a:lnRef>
+        <a:fillRef idx="0">
+          <a:schemeClr val="accent1"/>
+        </a:fillRef>
+        <a:effectRef idx="1">
+          <a:schemeClr val="accent1"/>
+        </a:effectRef>
+        <a:fontRef idx="minor">
+          <a:schemeClr val="tx1"/>
+        </a:fontRef>
+      </a:style>
+    </a:lnDef>
+  </a:objectDefaults>
+  <a:extraClrSchemeLst/>
+  <a:extLst>
+    <a:ext uri="{05A4C25C-085E-4340-85A3-A5531E510DB2}">
+      <thm15:themeFamily xmlns:thm15="http://schemas.microsoft.com/office/thememl/2012/main" name="Office Theme" id="{2E142A2C-CD16-42D6-873A-C26D2A0506FA}" vid="{1BDDFF52-6CD6-40A5-AB3C-68EB2F1E4D0A}"/>
+    </a:ext>
+  </a:extLst>
+</a:theme>
 </file>
--- a/PPT Rapport.pptx
+++ b/PPT Rapport.pptx
@@ -5,7 +5,7 @@
     <p:sldMasterId id="2147483648" r:id="rId1"/>
   </p:sldMasterIdLst>
   <p:notesMasterIdLst>
-    <p:notesMasterId r:id="rId11"/>
+    <p:notesMasterId r:id="rId12"/>
   </p:notesMasterIdLst>
   <p:sldIdLst>
     <p:sldId id="256" r:id="rId2"/>
@@ -17,6 +17,7 @@
     <p:sldId id="262" r:id="rId8"/>
     <p:sldId id="263" r:id="rId9"/>
     <p:sldId id="264" r:id="rId10"/>
+    <p:sldId id="265" r:id="rId11"/>
   </p:sldIdLst>
   <p:sldSz cx="9144000" cy="5143500" type="screen16x9"/>
   <p:notesSz cx="5143500" cy="9144000"/>
@@ -320,6 +321,114 @@
     <p:extLst>
       <p:ext uri="{BB962C8B-B14F-4D97-AF65-F5344CB8AC3E}">
         <p14:creationId xmlns:p14="http://schemas.microsoft.com/office/powerpoint/2010/main" val="1024086991"/>
+      </p:ext>
+    </p:extLst>
+  </p:cSld>
+  <p:clrMapOvr>
+    <a:masterClrMapping/>
+  </p:clrMapOvr>
+</p:notes>
+</file>
+
+<file path=ppt/notesSlides/notesSlide10.xml><?xml version="1.0" encoding="utf-8"?>
+<p:notes xmlns:a="http://schemas.openxmlformats.org/drawingml/2006/main" xmlns:r="http://schemas.openxmlformats.org/officeDocument/2006/relationships" xmlns:p="http://schemas.openxmlformats.org/presentationml/2006/main">
+  <p:cSld>
+    <p:spTree>
+      <p:nvGrpSpPr>
+        <p:cNvPr id="1" name="">
+          <a:extLst>
+            <a:ext uri="{FF2B5EF4-FFF2-40B4-BE49-F238E27FC236}">
+              <a16:creationId xmlns:a16="http://schemas.microsoft.com/office/drawing/2014/main" id="{FD5E8B5C-3913-73DF-3FAF-92C1DE4445DA}"/>
+            </a:ext>
+          </a:extLst>
+        </p:cNvPr>
+        <p:cNvGrpSpPr/>
+        <p:nvPr/>
+      </p:nvGrpSpPr>
+      <p:grpSpPr>
+        <a:xfrm>
+          <a:off x="0" y="0"/>
+          <a:ext cx="0" cy="0"/>
+          <a:chOff x="0" y="0"/>
+          <a:chExt cx="0" cy="0"/>
+        </a:xfrm>
+      </p:grpSpPr>
+      <p:sp>
+        <p:nvSpPr>
+          <p:cNvPr id="2" name="Slide Image Placeholder 1">
+            <a:extLst>
+              <a:ext uri="{FF2B5EF4-FFF2-40B4-BE49-F238E27FC236}">
+                <a16:creationId xmlns:a16="http://schemas.microsoft.com/office/drawing/2014/main" id="{685E1940-66E5-1784-384B-F0524898B8A2}"/>
+              </a:ext>
+            </a:extLst>
+          </p:cNvPr>
+          <p:cNvSpPr>
+            <a:spLocks noGrp="1" noRot="1" noChangeAspect="1"/>
+          </p:cNvSpPr>
+          <p:nvPr>
+            <p:ph type="sldImg"/>
+          </p:nvPr>
+        </p:nvSpPr>
+        <p:spPr/>
+      </p:sp>
+      <p:sp>
+        <p:nvSpPr>
+          <p:cNvPr id="3" name="Notes Placeholder 2">
+            <a:extLst>
+              <a:ext uri="{FF2B5EF4-FFF2-40B4-BE49-F238E27FC236}">
+                <a16:creationId xmlns:a16="http://schemas.microsoft.com/office/drawing/2014/main" id="{DFF2A4AB-21E7-6534-E9D4-1FE22FA352BD}"/>
+              </a:ext>
+            </a:extLst>
+          </p:cNvPr>
+          <p:cNvSpPr>
+            <a:spLocks noGrp="1"/>
+          </p:cNvSpPr>
+          <p:nvPr>
+            <p:ph type="body" idx="1"/>
+          </p:nvPr>
+        </p:nvSpPr>
+        <p:spPr/>
+        <p:txBody>
+          <a:bodyPr/>
+          <a:lstStyle/>
+          <a:p>
+            <a:endParaRPr lang="en-US" dirty="0"/>
+          </a:p>
+        </p:txBody>
+      </p:sp>
+      <p:sp>
+        <p:nvSpPr>
+          <p:cNvPr id="4" name="Slide Number Placeholder 3">
+            <a:extLst>
+              <a:ext uri="{FF2B5EF4-FFF2-40B4-BE49-F238E27FC236}">
+                <a16:creationId xmlns:a16="http://schemas.microsoft.com/office/drawing/2014/main" id="{0A28D4EF-F47D-DEF8-7850-B6CE5677FAD8}"/>
+              </a:ext>
+            </a:extLst>
+          </p:cNvPr>
+          <p:cNvSpPr>
+            <a:spLocks noGrp="1"/>
+          </p:cNvSpPr>
+          <p:nvPr>
+            <p:ph type="sldNum" sz="quarter" idx="10"/>
+          </p:nvPr>
+        </p:nvSpPr>
+        <p:spPr/>
+        <p:txBody>
+          <a:bodyPr/>
+          <a:lstStyle/>
+          <a:p>
+            <a:fld id="{F7021451-1387-4CA6-816F-3879F97B5CBC}" type="slidenum">
+              <a:rPr lang="en-US"/>
+              <a:t>10</a:t>
+            </a:fld>
+            <a:endParaRPr lang="en-US"/>
+          </a:p>
+        </p:txBody>
+      </p:sp>
+    </p:spTree>
+    <p:extLst>
+      <p:ext uri="{BB962C8B-B14F-4D97-AF65-F5344CB8AC3E}">
+        <p14:creationId xmlns:p14="http://schemas.microsoft.com/office/powerpoint/2010/main" val="269683186"/>
       </p:ext>
     </p:extLst>
   </p:cSld>
@@ -1466,6 +1575,17 @@
               <a:buNone/>
             </a:pPr>
             <a:r>
+              <a:rPr lang="en-US" sz="1600" dirty="0" err="1">
+                <a:solidFill>
+                  <a:srgbClr val="5C5C5C"/>
+                </a:solidFill>
+                <a:latin typeface="Arial" pitchFamily="34" charset="0"/>
+                <a:ea typeface="Arial" pitchFamily="34" charset="-122"/>
+                <a:cs typeface="Arial" pitchFamily="34" charset="-120"/>
+              </a:rPr>
+              <a:t>Réfutation</a:t>
+            </a:r>
+            <a:r>
               <a:rPr lang="en-US" sz="1600" dirty="0">
                 <a:solidFill>
                   <a:srgbClr val="5C5C5C"/>
@@ -1474,7 +1594,29 @@
                 <a:ea typeface="Arial" pitchFamily="34" charset="-122"/>
                 <a:cs typeface="Arial" pitchFamily="34" charset="-120"/>
               </a:rPr>
-              <a:t>Réfutation automatique de conjectures en théorie des graphes</a:t>
+              <a:t> de conjectures </a:t>
+            </a:r>
+            <a:r>
+              <a:rPr lang="en-US" sz="1600" dirty="0" err="1">
+                <a:solidFill>
+                  <a:srgbClr val="5C5C5C"/>
+                </a:solidFill>
+                <a:latin typeface="Arial" pitchFamily="34" charset="0"/>
+                <a:ea typeface="Arial" pitchFamily="34" charset="-122"/>
+                <a:cs typeface="Arial" pitchFamily="34" charset="-120"/>
+              </a:rPr>
+              <a:t>en</a:t>
+            </a:r>
+            <a:r>
+              <a:rPr lang="en-US" sz="1600" dirty="0">
+                <a:solidFill>
+                  <a:srgbClr val="5C5C5C"/>
+                </a:solidFill>
+                <a:latin typeface="Arial" pitchFamily="34" charset="0"/>
+                <a:ea typeface="Arial" pitchFamily="34" charset="-122"/>
+                <a:cs typeface="Arial" pitchFamily="34" charset="-120"/>
+              </a:rPr>
+              <a:t> OC</a:t>
             </a:r>
             <a:endParaRPr lang="en-US" sz="1600" dirty="0"/>
           </a:p>
@@ -1991,6 +2133,132 @@
         </p:txBody>
       </p:sp>
     </p:spTree>
+  </p:cSld>
+  <p:clrMapOvr>
+    <a:masterClrMapping/>
+  </p:clrMapOvr>
+</p:sld>
+</file>
+
+<file path=ppt/slides/slide10.xml><?xml version="1.0" encoding="utf-8"?>
+<p:sld xmlns:a="http://schemas.openxmlformats.org/drawingml/2006/main" xmlns:r="http://schemas.openxmlformats.org/officeDocument/2006/relationships" xmlns:p="http://schemas.openxmlformats.org/presentationml/2006/main">
+  <p:cSld>
+    <p:bg>
+      <p:bgPr>
+        <a:solidFill>
+          <a:srgbClr val="FAFAF7"/>
+        </a:solidFill>
+        <a:effectLst/>
+      </p:bgPr>
+    </p:bg>
+    <p:spTree>
+      <p:nvGrpSpPr>
+        <p:cNvPr id="1" name="">
+          <a:extLst>
+            <a:ext uri="{FF2B5EF4-FFF2-40B4-BE49-F238E27FC236}">
+              <a16:creationId xmlns:a16="http://schemas.microsoft.com/office/drawing/2014/main" id="{D12C1E87-3F3A-26CC-920F-C2C17E3D5F84}"/>
+            </a:ext>
+          </a:extLst>
+        </p:cNvPr>
+        <p:cNvGrpSpPr/>
+        <p:nvPr/>
+      </p:nvGrpSpPr>
+      <p:grpSpPr>
+        <a:xfrm>
+          <a:off x="0" y="0"/>
+          <a:ext cx="0" cy="0"/>
+          <a:chOff x="0" y="0"/>
+          <a:chExt cx="0" cy="0"/>
+        </a:xfrm>
+      </p:grpSpPr>
+      <p:sp>
+        <p:nvSpPr>
+          <p:cNvPr id="2" name="Shape 0">
+            <a:extLst>
+              <a:ext uri="{FF2B5EF4-FFF2-40B4-BE49-F238E27FC236}">
+                <a16:creationId xmlns:a16="http://schemas.microsoft.com/office/drawing/2014/main" id="{C6159240-FF56-0120-1C7C-1D310E082A28}"/>
+              </a:ext>
+            </a:extLst>
+          </p:cNvPr>
+          <p:cNvSpPr/>
+          <p:nvPr/>
+        </p:nvSpPr>
+        <p:spPr>
+          <a:xfrm>
+            <a:off x="0" y="-34290"/>
+            <a:ext cx="9144000" cy="5212080"/>
+          </a:xfrm>
+          <a:prstGeom prst="rect">
+            <a:avLst/>
+          </a:prstGeom>
+          <a:solidFill>
+            <a:srgbClr val="1F3A5F"/>
+          </a:solidFill>
+          <a:ln w="12700">
+            <a:solidFill>
+              <a:srgbClr val="1F3A5F"/>
+            </a:solidFill>
+            <a:prstDash val="solid"/>
+          </a:ln>
+        </p:spPr>
+        <p:txBody>
+          <a:bodyPr/>
+          <a:lstStyle/>
+          <a:p>
+            <a:endParaRPr lang="en-GB"/>
+          </a:p>
+        </p:txBody>
+      </p:sp>
+      <p:sp>
+        <p:nvSpPr>
+          <p:cNvPr id="3" name="Text 1">
+            <a:extLst>
+              <a:ext uri="{FF2B5EF4-FFF2-40B4-BE49-F238E27FC236}">
+                <a16:creationId xmlns:a16="http://schemas.microsoft.com/office/drawing/2014/main" id="{9B96A046-F833-00CB-212D-E9F0C09B7DD2}"/>
+              </a:ext>
+            </a:extLst>
+          </p:cNvPr>
+          <p:cNvSpPr/>
+          <p:nvPr/>
+        </p:nvSpPr>
+        <p:spPr>
+          <a:xfrm>
+            <a:off x="3193366" y="2215134"/>
+            <a:ext cx="8412480" cy="713232"/>
+          </a:xfrm>
+          <a:prstGeom prst="rect">
+            <a:avLst/>
+          </a:prstGeom>
+          <a:noFill/>
+          <a:ln/>
+        </p:spPr>
+        <p:txBody>
+          <a:bodyPr wrap="square" lIns="0" tIns="0" rIns="0" bIns="0" rtlCol="0" anchor="ctr"/>
+          <a:lstStyle/>
+          <a:p>
+            <a:pPr marL="0" indent="0">
+              <a:buNone/>
+            </a:pPr>
+            <a:r>
+              <a:rPr lang="en-US" sz="8000" b="1" dirty="0">
+                <a:solidFill>
+                  <a:srgbClr val="FFFFFF"/>
+                </a:solidFill>
+                <a:latin typeface="Arial" pitchFamily="34" charset="0"/>
+                <a:cs typeface="Arial" pitchFamily="34" charset="-120"/>
+              </a:rPr>
+              <a:t>Merci </a:t>
+            </a:r>
+            <a:endParaRPr lang="en-US" sz="8000" dirty="0"/>
+          </a:p>
+        </p:txBody>
+      </p:sp>
+    </p:spTree>
+    <p:extLst>
+      <p:ext uri="{BB962C8B-B14F-4D97-AF65-F5344CB8AC3E}">
+        <p14:creationId xmlns:p14="http://schemas.microsoft.com/office/powerpoint/2010/main" val="3193421406"/>
+      </p:ext>
+    </p:extLst>
   </p:cSld>
   <p:clrMapOvr>
     <a:masterClrMapping/>
@@ -3065,7 +3333,62 @@
                 <a:ea typeface="Arial" pitchFamily="34" charset="-122"/>
                 <a:cs typeface="Arial" pitchFamily="34" charset="-120"/>
               </a:rPr>
-              <a:t>Boucle locale 60 s : tournoi, mutation ciblée 70%, liste taboue, kick + redémarrage</a:t>
+              <a:t>Boucle locale 60 s : </a:t>
+            </a:r>
+            <a:r>
+              <a:rPr lang="en-US" sz="1300" dirty="0" err="1">
+                <a:solidFill>
+                  <a:srgbClr val="1A1A1A"/>
+                </a:solidFill>
+                <a:latin typeface="Arial" pitchFamily="34" charset="0"/>
+                <a:ea typeface="Arial" pitchFamily="34" charset="-122"/>
+                <a:cs typeface="Arial" pitchFamily="34" charset="-120"/>
+              </a:rPr>
+              <a:t>tournoi</a:t>
+            </a:r>
+            <a:r>
+              <a:rPr lang="en-US" sz="1300" dirty="0">
+                <a:solidFill>
+                  <a:srgbClr val="1A1A1A"/>
+                </a:solidFill>
+                <a:latin typeface="Arial" pitchFamily="34" charset="0"/>
+                <a:ea typeface="Arial" pitchFamily="34" charset="-122"/>
+                <a:cs typeface="Arial" pitchFamily="34" charset="-120"/>
+              </a:rPr>
+              <a:t>, mutation </a:t>
+            </a:r>
+            <a:r>
+              <a:rPr lang="en-US" sz="1300" dirty="0" err="1">
+                <a:solidFill>
+                  <a:srgbClr val="1A1A1A"/>
+                </a:solidFill>
+                <a:latin typeface="Arial" pitchFamily="34" charset="0"/>
+                <a:ea typeface="Arial" pitchFamily="34" charset="-122"/>
+                <a:cs typeface="Arial" pitchFamily="34" charset="-120"/>
+              </a:rPr>
+              <a:t>ciblée</a:t>
+            </a:r>
+            <a:r>
+              <a:rPr lang="en-US" sz="1300" dirty="0">
+                <a:solidFill>
+                  <a:srgbClr val="1A1A1A"/>
+                </a:solidFill>
+                <a:latin typeface="Arial" pitchFamily="34" charset="0"/>
+                <a:ea typeface="Arial" pitchFamily="34" charset="-122"/>
+                <a:cs typeface="Arial" pitchFamily="34" charset="-120"/>
+              </a:rPr>
+              <a:t> + </a:t>
+            </a:r>
+            <a:r>
+              <a:rPr lang="en-US" sz="1300" dirty="0" err="1">
+                <a:solidFill>
+                  <a:srgbClr val="1A1A1A"/>
+                </a:solidFill>
+                <a:latin typeface="Arial" pitchFamily="34" charset="0"/>
+                <a:ea typeface="Arial" pitchFamily="34" charset="-122"/>
+                <a:cs typeface="Arial" pitchFamily="34" charset="-120"/>
+              </a:rPr>
+              <a:t>redémarrage</a:t>
             </a:r>
             <a:endParaRPr lang="en-US" sz="1300" dirty="0"/>
           </a:p>
@@ -3999,7 +4322,51 @@
                 <a:ea typeface="Arial" pitchFamily="34" charset="-122"/>
                 <a:cs typeface="Arial" pitchFamily="34" charset="-120"/>
               </a:rPr>
-              <a:t>Exemple : clique_number(G) ≤ −1/2 + 15/8 · d̄(G)  →  réfutée par K₂ en 0,06 s (violation = 0,625).</a:t>
+              <a:t>Exemple : clique_number(G) ≤ −1/2 + 15/8 · d̄(G)  →  </a:t>
+            </a:r>
+            <a:r>
+              <a:rPr lang="en-US" sz="1200" i="1" dirty="0" err="1">
+                <a:solidFill>
+                  <a:srgbClr val="5C5C5C"/>
+                </a:solidFill>
+                <a:latin typeface="Arial" pitchFamily="34" charset="0"/>
+                <a:ea typeface="Arial" pitchFamily="34" charset="-122"/>
+                <a:cs typeface="Arial" pitchFamily="34" charset="-120"/>
+              </a:rPr>
+              <a:t>réfutée</a:t>
+            </a:r>
+            <a:r>
+              <a:rPr lang="en-US" sz="1200" i="1" dirty="0">
+                <a:solidFill>
+                  <a:srgbClr val="5C5C5C"/>
+                </a:solidFill>
+                <a:latin typeface="Arial" pitchFamily="34" charset="0"/>
+                <a:ea typeface="Arial" pitchFamily="34" charset="-122"/>
+                <a:cs typeface="Arial" pitchFamily="34" charset="-120"/>
+              </a:rPr>
+              <a:t> </a:t>
+            </a:r>
+            <a:r>
+              <a:rPr lang="en-US" sz="1200" i="1" dirty="0" err="1">
+                <a:solidFill>
+                  <a:srgbClr val="5C5C5C"/>
+                </a:solidFill>
+                <a:latin typeface="Arial" pitchFamily="34" charset="0"/>
+                <a:ea typeface="Arial" pitchFamily="34" charset="-122"/>
+                <a:cs typeface="Arial" pitchFamily="34" charset="-120"/>
+              </a:rPr>
+              <a:t>en</a:t>
+            </a:r>
+            <a:r>
+              <a:rPr lang="en-US" sz="1200" i="1" dirty="0">
+                <a:solidFill>
+                  <a:srgbClr val="5C5C5C"/>
+                </a:solidFill>
+                <a:latin typeface="Arial" pitchFamily="34" charset="0"/>
+                <a:ea typeface="Arial" pitchFamily="34" charset="-122"/>
+                <a:cs typeface="Arial" pitchFamily="34" charset="-120"/>
+              </a:rPr>
+              <a:t> 0,06 s (violation = 0,625).</a:t>
             </a:r>
             <a:endParaRPr lang="en-US" sz="1200" dirty="0"/>
           </a:p>
@@ -4337,7 +4704,7 @@
         </p:nvSpPr>
         <p:spPr>
           <a:xfrm>
-            <a:off x="457200" y="914400"/>
+            <a:off x="457200" y="1448973"/>
             <a:ext cx="4023360" cy="1737360"/>
           </a:xfrm>
           <a:prstGeom prst="rect">
@@ -4369,7 +4736,7 @@
         </p:nvSpPr>
         <p:spPr>
           <a:xfrm>
-            <a:off x="457200" y="914400"/>
+            <a:off x="457200" y="1448973"/>
             <a:ext cx="64008" cy="1737360"/>
           </a:xfrm>
           <a:prstGeom prst="rect">
@@ -4401,7 +4768,7 @@
         </p:nvSpPr>
         <p:spPr>
           <a:xfrm>
-            <a:off x="621792" y="1024128"/>
+            <a:off x="621792" y="1558701"/>
             <a:ext cx="3749040" cy="347472"/>
           </a:xfrm>
           <a:prstGeom prst="rect">
@@ -4440,7 +4807,7 @@
         </p:nvSpPr>
         <p:spPr>
           <a:xfrm>
-            <a:off x="621792" y="1417320"/>
+            <a:off x="621792" y="1951893"/>
             <a:ext cx="3749040" cy="1097280"/>
           </a:xfrm>
           <a:prstGeom prst="rect">
@@ -4465,7 +4832,29 @@
                 <a:ea typeface="Arial" pitchFamily="34" charset="-122"/>
                 <a:cs typeface="Arial" pitchFamily="34" charset="-120"/>
               </a:rPr>
-              <a:t>3 graphes tirés au hasard → garder le meilleur. Favorise les bons candidats sans ignorer les autres.</a:t>
+              <a:t>3 graphes tirés au </a:t>
+            </a:r>
+            <a:r>
+              <a:rPr lang="en-US" sz="1300" dirty="0" err="1">
+                <a:solidFill>
+                  <a:srgbClr val="1A1A1A"/>
+                </a:solidFill>
+                <a:latin typeface="Arial" pitchFamily="34" charset="0"/>
+                <a:ea typeface="Arial" pitchFamily="34" charset="-122"/>
+                <a:cs typeface="Arial" pitchFamily="34" charset="-120"/>
+              </a:rPr>
+              <a:t>hasard</a:t>
+            </a:r>
+            <a:r>
+              <a:rPr lang="en-US" sz="1300" dirty="0">
+                <a:solidFill>
+                  <a:srgbClr val="1A1A1A"/>
+                </a:solidFill>
+                <a:latin typeface="Arial" pitchFamily="34" charset="0"/>
+                <a:ea typeface="Arial" pitchFamily="34" charset="-122"/>
+                <a:cs typeface="Arial" pitchFamily="34" charset="-120"/>
+              </a:rPr>
+              <a:t> sur 10 → garder le meilleur. Favorise les bons candidats sans ignorer les autres.</a:t>
             </a:r>
             <a:endParaRPr lang="en-US" sz="1300" dirty="0"/>
           </a:p>
@@ -4479,7 +4868,7 @@
         </p:nvSpPr>
         <p:spPr>
           <a:xfrm>
-            <a:off x="4709160" y="914400"/>
+            <a:off x="4709160" y="1448973"/>
             <a:ext cx="4023360" cy="1737360"/>
           </a:xfrm>
           <a:prstGeom prst="rect">
@@ -4511,7 +4900,7 @@
         </p:nvSpPr>
         <p:spPr>
           <a:xfrm>
-            <a:off x="4709160" y="914400"/>
+            <a:off x="4709160" y="1448973"/>
             <a:ext cx="64008" cy="1737360"/>
           </a:xfrm>
           <a:prstGeom prst="rect">
@@ -4543,7 +4932,7 @@
         </p:nvSpPr>
         <p:spPr>
           <a:xfrm>
-            <a:off x="4873752" y="1024128"/>
+            <a:off x="4873752" y="1558701"/>
             <a:ext cx="3749040" cy="347472"/>
           </a:xfrm>
           <a:prstGeom prst="rect">
@@ -4582,7 +4971,7 @@
         </p:nvSpPr>
         <p:spPr>
           <a:xfrm>
-            <a:off x="4873752" y="1417320"/>
+            <a:off x="4873752" y="1951893"/>
             <a:ext cx="3749040" cy="1097280"/>
           </a:xfrm>
           <a:prstGeom prst="rect">
@@ -4607,7 +4996,29 @@
                 <a:ea typeface="Arial" pitchFamily="34" charset="-122"/>
                 <a:cs typeface="Arial" pitchFamily="34" charset="-120"/>
               </a:rPr>
-              <a:t>Guidées par la conjecture : augmenter triangle_number, étirer le diamètre, agrandir la clique…</a:t>
+              <a:t>Guidées par la conjecture : augmenter triangle_number, étirer le </a:t>
+            </a:r>
+            <a:r>
+              <a:rPr lang="en-US" sz="1300" dirty="0" err="1">
+                <a:solidFill>
+                  <a:srgbClr val="1A1A1A"/>
+                </a:solidFill>
+                <a:latin typeface="Arial" pitchFamily="34" charset="0"/>
+                <a:ea typeface="Arial" pitchFamily="34" charset="-122"/>
+                <a:cs typeface="Arial" pitchFamily="34" charset="-120"/>
+              </a:rPr>
+              <a:t>diamètre</a:t>
+            </a:r>
+            <a:r>
+              <a:rPr lang="en-US" sz="1300" dirty="0">
+                <a:solidFill>
+                  <a:srgbClr val="1A1A1A"/>
+                </a:solidFill>
+                <a:latin typeface="Arial" pitchFamily="34" charset="0"/>
+                <a:ea typeface="Arial" pitchFamily="34" charset="-122"/>
+                <a:cs typeface="Arial" pitchFamily="34" charset="-120"/>
+              </a:rPr>
+              <a:t>…</a:t>
             </a:r>
             <a:endParaRPr lang="en-US" sz="1300" dirty="0"/>
           </a:p>
@@ -4621,7 +5032,7 @@
         </p:nvSpPr>
         <p:spPr>
           <a:xfrm>
-            <a:off x="457200" y="2743200"/>
+            <a:off x="457200" y="3277773"/>
             <a:ext cx="4023360" cy="1737360"/>
           </a:xfrm>
           <a:prstGeom prst="rect">
@@ -4641,7 +5052,7 @@
           <a:bodyPr/>
           <a:lstStyle/>
           <a:p>
-            <a:endParaRPr lang="en-GB"/>
+            <a:endParaRPr lang="en-GB" dirty="0"/>
           </a:p>
         </p:txBody>
       </p:sp>
@@ -4653,7 +5064,7 @@
         </p:nvSpPr>
         <p:spPr>
           <a:xfrm>
-            <a:off x="457200" y="2743200"/>
+            <a:off x="457200" y="3277773"/>
             <a:ext cx="64008" cy="1737360"/>
           </a:xfrm>
           <a:prstGeom prst="rect">
@@ -4685,7 +5096,7 @@
         </p:nvSpPr>
         <p:spPr>
           <a:xfrm>
-            <a:off x="621792" y="2852928"/>
+            <a:off x="621792" y="3387501"/>
             <a:ext cx="3749040" cy="347472"/>
           </a:xfrm>
           <a:prstGeom prst="rect">
@@ -4702,7 +5113,7 @@
               <a:buNone/>
             </a:pPr>
             <a:r>
-              <a:rPr lang="en-US" sz="1400" b="1" dirty="0">
+              <a:rPr lang="en-US" sz="1400" b="1" dirty="0" err="1">
                 <a:solidFill>
                   <a:srgbClr val="1F3A5F"/>
                 </a:solidFill>
@@ -4710,7 +5121,7 @@
                 <a:ea typeface="Arial" pitchFamily="34" charset="-122"/>
                 <a:cs typeface="Arial" pitchFamily="34" charset="-120"/>
               </a:rPr>
-              <a:t>Liste taboue</a:t>
+              <a:t>Itérations</a:t>
             </a:r>
             <a:endParaRPr lang="en-US" sz="1400" dirty="0"/>
           </a:p>
@@ -4724,7 +5135,7 @@
         </p:nvSpPr>
         <p:spPr>
           <a:xfrm>
-            <a:off x="621792" y="3246120"/>
+            <a:off x="621792" y="3780693"/>
             <a:ext cx="3749040" cy="1097280"/>
           </a:xfrm>
           <a:prstGeom prst="rect">
@@ -4741,7 +5152,7 @@
               <a:buNone/>
             </a:pPr>
             <a:r>
-              <a:rPr lang="en-US" sz="1300" dirty="0">
+              <a:rPr lang="fr-FR" sz="1300" dirty="0">
                 <a:solidFill>
                   <a:srgbClr val="1A1A1A"/>
                 </a:solidFill>
@@ -4749,7 +5160,7 @@
                 <a:ea typeface="Arial" pitchFamily="34" charset="-122"/>
                 <a:cs typeface="Arial" pitchFamily="34" charset="-120"/>
               </a:rPr>
-              <a:t>Chaque graphe visité est converti en chaîne graph6 et mémorisé. Pas de retour en arrière.</a:t>
+              <a:t>À chaque itération on retire 3 autres graphes au hasard parmi les 10</a:t>
             </a:r>
             <a:endParaRPr lang="en-US" sz="1300" dirty="0"/>
           </a:p>
@@ -4763,7 +5174,7 @@
         </p:nvSpPr>
         <p:spPr>
           <a:xfrm>
-            <a:off x="4709160" y="2743200"/>
+            <a:off x="4709160" y="3277773"/>
             <a:ext cx="4023360" cy="1737360"/>
           </a:xfrm>
           <a:prstGeom prst="rect">
@@ -4795,7 +5206,7 @@
         </p:nvSpPr>
         <p:spPr>
           <a:xfrm>
-            <a:off x="4709160" y="2743200"/>
+            <a:off x="4709160" y="3277773"/>
             <a:ext cx="64008" cy="1737360"/>
           </a:xfrm>
           <a:prstGeom prst="rect">
@@ -4827,7 +5238,7 @@
         </p:nvSpPr>
         <p:spPr>
           <a:xfrm>
-            <a:off x="4873752" y="2852928"/>
+            <a:off x="4873752" y="3387501"/>
             <a:ext cx="3749040" cy="347472"/>
           </a:xfrm>
           <a:prstGeom prst="rect">
@@ -4866,7 +5277,7 @@
         </p:nvSpPr>
         <p:spPr>
           <a:xfrm>
-            <a:off x="4873752" y="3246120"/>
+            <a:off x="4873752" y="3780693"/>
             <a:ext cx="3749040" cy="1097280"/>
           </a:xfrm>
           <a:prstGeom prst="rect">
@@ -4894,6 +5305,172 @@
               <a:t>Blocage (100 iter) → 4 mutations d'un coup. Toujours bloqué (500 iter) → nouvelle population.</a:t>
             </a:r>
             <a:endParaRPr lang="en-US" sz="1300" dirty="0"/>
+          </a:p>
+        </p:txBody>
+      </p:sp>
+      <p:sp>
+        <p:nvSpPr>
+          <p:cNvPr id="21" name="Shape 3">
+            <a:extLst>
+              <a:ext uri="{FF2B5EF4-FFF2-40B4-BE49-F238E27FC236}">
+                <a16:creationId xmlns:a16="http://schemas.microsoft.com/office/drawing/2014/main" id="{6652AECB-25C0-AE0D-EF94-8917D8D7EBD0}"/>
+              </a:ext>
+            </a:extLst>
+          </p:cNvPr>
+          <p:cNvSpPr/>
+          <p:nvPr/>
+        </p:nvSpPr>
+        <p:spPr>
+          <a:xfrm>
+            <a:off x="457200" y="758952"/>
+            <a:ext cx="8275320" cy="609660"/>
+          </a:xfrm>
+          <a:prstGeom prst="rect">
+            <a:avLst/>
+          </a:prstGeom>
+          <a:solidFill>
+            <a:srgbClr val="F0EFEB"/>
+          </a:solidFill>
+          <a:ln w="12700">
+            <a:solidFill>
+              <a:srgbClr val="C9C5BC"/>
+            </a:solidFill>
+            <a:prstDash val="solid"/>
+          </a:ln>
+        </p:spPr>
+        <p:txBody>
+          <a:bodyPr/>
+          <a:lstStyle/>
+          <a:p>
+            <a:endParaRPr lang="en-GB" dirty="0"/>
+          </a:p>
+        </p:txBody>
+      </p:sp>
+      <p:sp>
+        <p:nvSpPr>
+          <p:cNvPr id="22" name="Text 5">
+            <a:extLst>
+              <a:ext uri="{FF2B5EF4-FFF2-40B4-BE49-F238E27FC236}">
+                <a16:creationId xmlns:a16="http://schemas.microsoft.com/office/drawing/2014/main" id="{5FD9DF84-053C-A220-F328-5B7CA7AC1175}"/>
+              </a:ext>
+            </a:extLst>
+          </p:cNvPr>
+          <p:cNvSpPr/>
+          <p:nvPr/>
+        </p:nvSpPr>
+        <p:spPr>
+          <a:xfrm>
+            <a:off x="611124" y="758952"/>
+            <a:ext cx="3749040" cy="347472"/>
+          </a:xfrm>
+          <a:prstGeom prst="rect">
+            <a:avLst/>
+          </a:prstGeom>
+          <a:noFill/>
+          <a:ln/>
+        </p:spPr>
+        <p:txBody>
+          <a:bodyPr wrap="square" rtlCol="0" anchor="ctr"/>
+          <a:lstStyle/>
+          <a:p>
+            <a:pPr marL="0" indent="0">
+              <a:buNone/>
+            </a:pPr>
+            <a:r>
+              <a:rPr lang="en-US" sz="1400" b="1" dirty="0">
+                <a:solidFill>
+                  <a:srgbClr val="1F3A5F"/>
+                </a:solidFill>
+                <a:latin typeface="Arial" pitchFamily="34" charset="0"/>
+                <a:ea typeface="Arial" pitchFamily="34" charset="-122"/>
+                <a:cs typeface="Arial" pitchFamily="34" charset="-120"/>
+              </a:rPr>
+              <a:t>Famille de depart</a:t>
+            </a:r>
+            <a:endParaRPr lang="en-US" sz="1400" dirty="0"/>
+          </a:p>
+        </p:txBody>
+      </p:sp>
+      <p:sp>
+        <p:nvSpPr>
+          <p:cNvPr id="23" name="Text 14">
+            <a:extLst>
+              <a:ext uri="{FF2B5EF4-FFF2-40B4-BE49-F238E27FC236}">
+                <a16:creationId xmlns:a16="http://schemas.microsoft.com/office/drawing/2014/main" id="{8B2E3FC3-8990-4999-7F90-EE5DE98F01F1}"/>
+              </a:ext>
+            </a:extLst>
+          </p:cNvPr>
+          <p:cNvSpPr/>
+          <p:nvPr/>
+        </p:nvSpPr>
+        <p:spPr>
+          <a:xfrm>
+            <a:off x="594360" y="815751"/>
+            <a:ext cx="6233042" cy="726948"/>
+          </a:xfrm>
+          <a:prstGeom prst="rect">
+            <a:avLst/>
+          </a:prstGeom>
+          <a:noFill/>
+          <a:ln/>
+        </p:spPr>
+        <p:txBody>
+          <a:bodyPr wrap="square" rtlCol="0" anchor="ctr"/>
+          <a:lstStyle/>
+          <a:p>
+            <a:pPr marL="0" indent="0">
+              <a:buNone/>
+            </a:pPr>
+            <a:r>
+              <a:rPr lang="fr-FR" sz="1300" dirty="0">
+                <a:solidFill>
+                  <a:srgbClr val="1A1A1A"/>
+                </a:solidFill>
+                <a:latin typeface="Arial" pitchFamily="34" charset="0"/>
+                <a:ea typeface="Arial" pitchFamily="34" charset="-122"/>
+                <a:cs typeface="Arial" pitchFamily="34" charset="-120"/>
+              </a:rPr>
+              <a:t>10 graphes sont choisis en fonction des invariants</a:t>
+            </a:r>
+            <a:endParaRPr lang="en-US" sz="1300" dirty="0"/>
+          </a:p>
+        </p:txBody>
+      </p:sp>
+      <p:sp>
+        <p:nvSpPr>
+          <p:cNvPr id="24" name="Shape 4">
+            <a:extLst>
+              <a:ext uri="{FF2B5EF4-FFF2-40B4-BE49-F238E27FC236}">
+                <a16:creationId xmlns:a16="http://schemas.microsoft.com/office/drawing/2014/main" id="{9159F6F8-48CE-48E1-5BDC-781270AD2A42}"/>
+              </a:ext>
+            </a:extLst>
+          </p:cNvPr>
+          <p:cNvSpPr/>
+          <p:nvPr/>
+        </p:nvSpPr>
+        <p:spPr>
+          <a:xfrm>
+            <a:off x="457200" y="758952"/>
+            <a:ext cx="64008" cy="609660"/>
+          </a:xfrm>
+          <a:prstGeom prst="rect">
+            <a:avLst/>
+          </a:prstGeom>
+          <a:solidFill>
+            <a:srgbClr val="1F3A5F"/>
+          </a:solidFill>
+          <a:ln w="12700">
+            <a:solidFill>
+              <a:srgbClr val="1F3A5F"/>
+            </a:solidFill>
+            <a:prstDash val="solid"/>
+          </a:ln>
+        </p:spPr>
+        <p:txBody>
+          <a:bodyPr/>
+          <a:lstStyle/>
+          <a:p>
+            <a:endParaRPr lang="en-GB"/>
           </a:p>
         </p:txBody>
       </p:sp>
@@ -5945,7 +6522,7 @@
                 <a:ea typeface="Arial" pitchFamily="34" charset="-122"/>
                 <a:cs typeface="Arial" pitchFamily="34" charset="-120"/>
               </a:rPr>
-              <a:t>221,51 s</a:t>
+              <a:t>221,51</a:t>
             </a:r>
             <a:endParaRPr lang="en-US" sz="3600" dirty="0"/>
           </a:p>
@@ -6226,7 +6803,7 @@
         </p:nvGraphicFramePr>
         <p:xfrm>
           <a:off x="457200" y="2240280"/>
-          <a:ext cx="8229600" cy="914400"/>
+          <a:ext cx="8229600" cy="1920240"/>
         </p:xfrm>
         <a:graphic>
           <a:graphicData uri="http://schemas.openxmlformats.org/drawingml/2006/table">
@@ -8172,7 +8749,7 @@
                 <a:ea typeface="Arial" pitchFamily="34" charset="-122"/>
                 <a:cs typeface="Arial" pitchFamily="34" charset="-120"/>
               </a:rPr>
-              <a:t>99 conjectures réfutées sur 100 — score total 221,51 s</a:t>
+              <a:t>99 conjectures réfutées sur 100 — score total 221,51</a:t>
             </a:r>
             <a:endParaRPr lang="en-US" sz="2000" dirty="0"/>
           </a:p>
